--- a/2024/2024-07-26-AI-Updates.pptx
+++ b/2024/2024-07-26-AI-Updates.pptx
@@ -5,7 +5,7 @@
     <p:sldMasterId id="2147483660" r:id="rId1"/>
   </p:sldMasterIdLst>
   <p:notesMasterIdLst>
-    <p:notesMasterId r:id="rId18"/>
+    <p:notesMasterId r:id="rId19"/>
   </p:notesMasterIdLst>
   <p:sldIdLst>
     <p:sldId id="256" r:id="rId2"/>
@@ -24,16 +24,17 @@
     <p:sldId id="269" r:id="rId15"/>
     <p:sldId id="270" r:id="rId16"/>
     <p:sldId id="271" r:id="rId17"/>
+    <p:sldId id="272" r:id="rId18"/>
   </p:sldIdLst>
   <p:sldSz cx="9144000" cy="5143500" type="screen16x9"/>
   <p:notesSz cx="6858000" cy="9144000"/>
   <p:embeddedFontLst>
     <p:embeddedFont>
       <p:font typeface="Roboto Mono" pitchFamily="49" charset="0"/>
-      <p:regular r:id="rId19"/>
-      <p:bold r:id="rId20"/>
-      <p:italic r:id="rId21"/>
-      <p:boldItalic r:id="rId22"/>
+      <p:regular r:id="rId20"/>
+      <p:bold r:id="rId21"/>
+      <p:italic r:id="rId22"/>
+      <p:boldItalic r:id="rId23"/>
     </p:embeddedFont>
   </p:embeddedFontLst>
   <p:defaultTextStyle>
@@ -974,7 +975,7 @@
   <p:cSld>
     <p:spTree>
       <p:nvGrpSpPr>
-        <p:cNvPr id="1" name="Shape 157"/>
+        <p:cNvPr id="1" name="Shape 151"/>
         <p:cNvGrpSpPr/>
         <p:nvPr/>
       </p:nvGrpSpPr>
@@ -988,7 +989,7 @@
       </p:grpSpPr>
       <p:sp>
         <p:nvSpPr>
-          <p:cNvPr id="158" name="Google Shape;158;g2ee83c2e702_0_11:notes"/>
+          <p:cNvPr id="152" name="Google Shape;152;g2ee3516cb4d_0_15:notes"/>
           <p:cNvSpPr>
             <a:spLocks noGrp="1" noRot="1" noChangeAspect="1"/>
           </p:cNvSpPr>
@@ -1039,7 +1040,7 @@
       </p:sp>
       <p:sp>
         <p:nvSpPr>
-          <p:cNvPr id="159" name="Google Shape;159;g2ee83c2e702_0_11:notes"/>
+          <p:cNvPr id="153" name="Google Shape;153;g2ee3516cb4d_0_15:notes"/>
           <p:cNvSpPr txBox="1">
             <a:spLocks noGrp="1"/>
           </p:cNvSpPr>
@@ -1096,7 +1097,7 @@
   <p:cSld>
     <p:spTree>
       <p:nvGrpSpPr>
-        <p:cNvPr id="1" name="Shape 163"/>
+        <p:cNvPr id="1" name="Shape 166"/>
         <p:cNvGrpSpPr/>
         <p:nvPr/>
       </p:nvGrpSpPr>
@@ -1110,7 +1111,7 @@
       </p:grpSpPr>
       <p:sp>
         <p:nvSpPr>
-          <p:cNvPr id="164" name="Google Shape;164;g2ee3516cb4d_0_32:notes"/>
+          <p:cNvPr id="167" name="Google Shape;167;g2ee83c2e702_0_11:notes"/>
           <p:cNvSpPr>
             <a:spLocks noGrp="1" noRot="1" noChangeAspect="1"/>
           </p:cNvSpPr>
@@ -1161,7 +1162,7 @@
       </p:sp>
       <p:sp>
         <p:nvSpPr>
-          <p:cNvPr id="165" name="Google Shape;165;g2ee3516cb4d_0_32:notes"/>
+          <p:cNvPr id="168" name="Google Shape;168;g2ee83c2e702_0_11:notes"/>
           <p:cNvSpPr txBox="1">
             <a:spLocks noGrp="1"/>
           </p:cNvSpPr>
@@ -1218,7 +1219,7 @@
   <p:cSld>
     <p:spTree>
       <p:nvGrpSpPr>
-        <p:cNvPr id="1" name="Shape 173"/>
+        <p:cNvPr id="1" name="Shape 176"/>
         <p:cNvGrpSpPr/>
         <p:nvPr/>
       </p:nvGrpSpPr>
@@ -1232,7 +1233,7 @@
       </p:grpSpPr>
       <p:sp>
         <p:nvSpPr>
-          <p:cNvPr id="174" name="Google Shape;174;g2e8a450c44d_0_185:notes"/>
+          <p:cNvPr id="177" name="Google Shape;177;g2ee3516cb4d_0_32:notes"/>
           <p:cNvSpPr>
             <a:spLocks noGrp="1" noRot="1" noChangeAspect="1"/>
           </p:cNvSpPr>
@@ -1283,7 +1284,7 @@
       </p:sp>
       <p:sp>
         <p:nvSpPr>
-          <p:cNvPr id="175" name="Google Shape;175;g2e8a450c44d_0_185:notes"/>
+          <p:cNvPr id="178" name="Google Shape;178;g2ee3516cb4d_0_32:notes"/>
           <p:cNvSpPr txBox="1">
             <a:spLocks noGrp="1"/>
           </p:cNvSpPr>
@@ -1340,7 +1341,7 @@
   <p:cSld>
     <p:spTree>
       <p:nvGrpSpPr>
-        <p:cNvPr id="1" name="Shape 196"/>
+        <p:cNvPr id="1" name="Shape 186"/>
         <p:cNvGrpSpPr/>
         <p:nvPr/>
       </p:nvGrpSpPr>
@@ -1354,7 +1355,7 @@
       </p:grpSpPr>
       <p:sp>
         <p:nvSpPr>
-          <p:cNvPr id="197" name="Google Shape;197;g2eba0d0ca6f_0_0:notes"/>
+          <p:cNvPr id="187" name="Google Shape;187;g2e8a450c44d_0_185:notes"/>
           <p:cNvSpPr>
             <a:spLocks noGrp="1" noRot="1" noChangeAspect="1"/>
           </p:cNvSpPr>
@@ -1405,7 +1406,7 @@
       </p:sp>
       <p:sp>
         <p:nvSpPr>
-          <p:cNvPr id="198" name="Google Shape;198;g2eba0d0ca6f_0_0:notes"/>
+          <p:cNvPr id="188" name="Google Shape;188;g2e8a450c44d_0_185:notes"/>
           <p:cNvSpPr txBox="1">
             <a:spLocks noGrp="1"/>
           </p:cNvSpPr>
@@ -1462,7 +1463,7 @@
   <p:cSld>
     <p:spTree>
       <p:nvGrpSpPr>
-        <p:cNvPr id="1" name="Shape 220"/>
+        <p:cNvPr id="1" name="Shape 209"/>
         <p:cNvGrpSpPr/>
         <p:nvPr/>
       </p:nvGrpSpPr>
@@ -1476,7 +1477,7 @@
       </p:grpSpPr>
       <p:sp>
         <p:nvSpPr>
-          <p:cNvPr id="221" name="Google Shape;221;p21:notes"/>
+          <p:cNvPr id="210" name="Google Shape;210;g2eba0d0ca6f_0_0:notes"/>
           <p:cNvSpPr>
             <a:spLocks noGrp="1" noRot="1" noChangeAspect="1"/>
           </p:cNvSpPr>
@@ -1527,7 +1528,7 @@
       </p:sp>
       <p:sp>
         <p:nvSpPr>
-          <p:cNvPr id="222" name="Google Shape;222;p21:notes"/>
+          <p:cNvPr id="211" name="Google Shape;211;g2eba0d0ca6f_0_0:notes"/>
           <p:cNvSpPr txBox="1">
             <a:spLocks noGrp="1"/>
           </p:cNvSpPr>
@@ -1584,7 +1585,7 @@
   <p:cSld>
     <p:spTree>
       <p:nvGrpSpPr>
-        <p:cNvPr id="1" name="Shape 230"/>
+        <p:cNvPr id="1" name="Shape 233"/>
         <p:cNvGrpSpPr/>
         <p:nvPr/>
       </p:nvGrpSpPr>
@@ -1598,7 +1599,129 @@
       </p:grpSpPr>
       <p:sp>
         <p:nvSpPr>
-          <p:cNvPr id="231" name="Google Shape;231;p22:notes"/>
+          <p:cNvPr id="234" name="Google Shape;234;p21:notes"/>
+          <p:cNvSpPr>
+            <a:spLocks noGrp="1" noRot="1" noChangeAspect="1"/>
+          </p:cNvSpPr>
+          <p:nvPr>
+            <p:ph type="sldImg" idx="2"/>
+          </p:nvPr>
+        </p:nvSpPr>
+        <p:spPr>
+          <a:xfrm>
+            <a:off x="381300" y="685800"/>
+            <a:ext cx="6096000" cy="3429000"/>
+          </a:xfrm>
+          <a:custGeom>
+            <a:avLst/>
+            <a:gdLst/>
+            <a:ahLst/>
+            <a:cxnLst/>
+            <a:rect l="l" t="t" r="r" b="b"/>
+            <a:pathLst>
+              <a:path w="120000" h="120000" extrusionOk="0">
+                <a:moveTo>
+                  <a:pt x="0" y="0"/>
+                </a:moveTo>
+                <a:lnTo>
+                  <a:pt x="120000" y="0"/>
+                </a:lnTo>
+                <a:lnTo>
+                  <a:pt x="120000" y="120000"/>
+                </a:lnTo>
+                <a:lnTo>
+                  <a:pt x="0" y="120000"/>
+                </a:lnTo>
+                <a:close/>
+              </a:path>
+            </a:pathLst>
+          </a:custGeom>
+          <a:noFill/>
+          <a:ln w="9525" cap="flat" cmpd="sng">
+            <a:solidFill>
+              <a:srgbClr val="000000"/>
+            </a:solidFill>
+            <a:prstDash val="solid"/>
+            <a:round/>
+            <a:headEnd type="none" w="sm" len="sm"/>
+            <a:tailEnd type="none" w="sm" len="sm"/>
+          </a:ln>
+        </p:spPr>
+      </p:sp>
+      <p:sp>
+        <p:nvSpPr>
+          <p:cNvPr id="235" name="Google Shape;235;p21:notes"/>
+          <p:cNvSpPr txBox="1">
+            <a:spLocks noGrp="1"/>
+          </p:cNvSpPr>
+          <p:nvPr>
+            <p:ph type="body" idx="1"/>
+          </p:nvPr>
+        </p:nvSpPr>
+        <p:spPr>
+          <a:xfrm>
+            <a:off x="685800" y="4343400"/>
+            <a:ext cx="5486400" cy="4114800"/>
+          </a:xfrm>
+          <a:prstGeom prst="rect">
+            <a:avLst/>
+          </a:prstGeom>
+          <a:noFill/>
+          <a:ln>
+            <a:noFill/>
+          </a:ln>
+        </p:spPr>
+        <p:txBody>
+          <a:bodyPr spcFirstLastPara="1" wrap="square" lIns="91425" tIns="91425" rIns="91425" bIns="91425" anchor="t" anchorCtr="0">
+            <a:noAutofit/>
+          </a:bodyPr>
+          <a:lstStyle/>
+          <a:p>
+            <a:pPr marL="0" lvl="0" indent="0" algn="l" rtl="0">
+              <a:lnSpc>
+                <a:spcPct val="100000"/>
+              </a:lnSpc>
+              <a:spcBef>
+                <a:spcPts val="0"/>
+              </a:spcBef>
+              <a:spcAft>
+                <a:spcPts val="0"/>
+              </a:spcAft>
+              <a:buSzPts val="1100"/>
+              <a:buNone/>
+            </a:pPr>
+            <a:endParaRPr/>
+          </a:p>
+        </p:txBody>
+      </p:sp>
+    </p:spTree>
+  </p:cSld>
+  <p:clrMapOvr>
+    <a:masterClrMapping/>
+  </p:clrMapOvr>
+</p:notes>
+</file>
+
+<file path=ppt/notesSlides/notesSlide16.xml><?xml version="1.0" encoding="utf-8"?>
+<p:notes xmlns:a="http://schemas.openxmlformats.org/drawingml/2006/main" xmlns:r="http://schemas.openxmlformats.org/officeDocument/2006/relationships" xmlns:p="http://schemas.openxmlformats.org/presentationml/2006/main" showMasterSp="0" showMasterPhAnim="0">
+  <p:cSld>
+    <p:spTree>
+      <p:nvGrpSpPr>
+        <p:cNvPr id="1" name="Shape 244"/>
+        <p:cNvGrpSpPr/>
+        <p:nvPr/>
+      </p:nvGrpSpPr>
+      <p:grpSpPr>
+        <a:xfrm>
+          <a:off x="0" y="0"/>
+          <a:ext cx="0" cy="0"/>
+          <a:chOff x="0" y="0"/>
+          <a:chExt cx="0" cy="0"/>
+        </a:xfrm>
+      </p:grpSpPr>
+      <p:sp>
+        <p:nvSpPr>
+          <p:cNvPr id="245" name="Google Shape;245;p22:notes"/>
           <p:cNvSpPr>
             <a:spLocks noGrp="1" noRot="1" noChangeAspect="1"/>
           </p:cNvSpPr>
@@ -1649,7 +1772,7 @@
       </p:sp>
       <p:sp>
         <p:nvSpPr>
-          <p:cNvPr id="232" name="Google Shape;232;p22:notes"/>
+          <p:cNvPr id="246" name="Google Shape;246;p22:notes"/>
           <p:cNvSpPr txBox="1">
             <a:spLocks noGrp="1"/>
           </p:cNvSpPr>
@@ -1701,12 +1824,12 @@
 </p:notes>
 </file>
 
-<file path=ppt/notesSlides/notesSlide16.xml><?xml version="1.0" encoding="utf-8"?>
+<file path=ppt/notesSlides/notesSlide17.xml><?xml version="1.0" encoding="utf-8"?>
 <p:notes xmlns:a="http://schemas.openxmlformats.org/drawingml/2006/main" xmlns:r="http://schemas.openxmlformats.org/officeDocument/2006/relationships" xmlns:p="http://schemas.openxmlformats.org/presentationml/2006/main" showMasterSp="0" showMasterPhAnim="0">
   <p:cSld>
     <p:spTree>
       <p:nvGrpSpPr>
-        <p:cNvPr id="1" name="Shape 240"/>
+        <p:cNvPr id="1" name="Shape 254"/>
         <p:cNvGrpSpPr/>
         <p:nvPr/>
       </p:nvGrpSpPr>
@@ -1720,7 +1843,7 @@
       </p:grpSpPr>
       <p:sp>
         <p:nvSpPr>
-          <p:cNvPr id="241" name="Google Shape;241;p23:notes"/>
+          <p:cNvPr id="255" name="Google Shape;255;p23:notes"/>
           <p:cNvSpPr>
             <a:spLocks noGrp="1" noRot="1" noChangeAspect="1"/>
           </p:cNvSpPr>
@@ -1771,7 +1894,7 @@
       </p:sp>
       <p:sp>
         <p:nvSpPr>
-          <p:cNvPr id="242" name="Google Shape;242;p23:notes"/>
+          <p:cNvPr id="256" name="Google Shape;256;p23:notes"/>
           <p:cNvSpPr txBox="1">
             <a:spLocks noGrp="1"/>
           </p:cNvSpPr>
@@ -2574,7 +2697,7 @@
       </p:grpSpPr>
       <p:sp>
         <p:nvSpPr>
-          <p:cNvPr id="131" name="Google Shape;131;g2ee17fdba1b_0_20:notes"/>
+          <p:cNvPr id="131" name="Google Shape;131;g2ee8d4c7e9a_0_4:notes"/>
           <p:cNvSpPr>
             <a:spLocks noGrp="1" noRot="1" noChangeAspect="1"/>
           </p:cNvSpPr>
@@ -2625,7 +2748,7 @@
       </p:sp>
       <p:sp>
         <p:nvSpPr>
-          <p:cNvPr id="132" name="Google Shape;132;g2ee17fdba1b_0_20:notes"/>
+          <p:cNvPr id="132" name="Google Shape;132;g2ee8d4c7e9a_0_4:notes"/>
           <p:cNvSpPr txBox="1">
             <a:spLocks noGrp="1"/>
           </p:cNvSpPr>
@@ -2682,7 +2805,7 @@
   <p:cSld>
     <p:spTree>
       <p:nvGrpSpPr>
-        <p:cNvPr id="1" name="Shape 142"/>
+        <p:cNvPr id="1" name="Shape 139"/>
         <p:cNvGrpSpPr/>
         <p:nvPr/>
       </p:nvGrpSpPr>
@@ -2696,7 +2819,7 @@
       </p:grpSpPr>
       <p:sp>
         <p:nvSpPr>
-          <p:cNvPr id="143" name="Google Shape;143;g2ee3516cb4d_0_15:notes"/>
+          <p:cNvPr id="140" name="Google Shape;140;g2ee17fdba1b_0_20:notes"/>
           <p:cNvSpPr>
             <a:spLocks noGrp="1" noRot="1" noChangeAspect="1"/>
           </p:cNvSpPr>
@@ -2747,7 +2870,7 @@
       </p:sp>
       <p:sp>
         <p:nvSpPr>
-          <p:cNvPr id="144" name="Google Shape;144;g2ee3516cb4d_0_15:notes"/>
+          <p:cNvPr id="141" name="Google Shape;141;g2ee17fdba1b_0_20:notes"/>
           <p:cNvSpPr txBox="1">
             <a:spLocks noGrp="1"/>
           </p:cNvSpPr>
@@ -10860,7 +10983,7 @@
         <p:spPr>
           <a:xfrm>
             <a:off x="83860" y="1284725"/>
-            <a:ext cx="4420200" cy="3186300"/>
+            <a:ext cx="4420200" cy="3648000"/>
           </a:xfrm>
           <a:prstGeom prst="rect">
             <a:avLst/>
@@ -11389,7 +11512,87 @@
                 <a:cs typeface="Calibri"/>
                 <a:sym typeface="Calibri"/>
               </a:rPr>
-              <a:t>window.ai - run LLM in Google Chrome</a:t>
+              <a:t>window.ai - run LLM in Google Chrome </a:t>
+            </a:r>
+            <a:endParaRPr sz="1500" b="1">
+              <a:solidFill>
+                <a:srgbClr val="3C78D8"/>
+              </a:solidFill>
+              <a:latin typeface="Calibri"/>
+              <a:ea typeface="Calibri"/>
+              <a:cs typeface="Calibri"/>
+              <a:sym typeface="Calibri"/>
+            </a:endParaRPr>
+          </a:p>
+          <a:p>
+            <a:pPr marL="228600" marR="0" lvl="0" indent="-209550" algn="l" rtl="0">
+              <a:lnSpc>
+                <a:spcPct val="100000"/>
+              </a:lnSpc>
+              <a:spcBef>
+                <a:spcPts val="0"/>
+              </a:spcBef>
+              <a:spcAft>
+                <a:spcPts val="0"/>
+              </a:spcAft>
+              <a:buClr>
+                <a:srgbClr val="3C78D8"/>
+              </a:buClr>
+              <a:buSzPts val="1500"/>
+              <a:buFont typeface="Calibri"/>
+              <a:buChar char="●"/>
+            </a:pPr>
+            <a:r>
+              <a:rPr lang="en" sz="1500" b="1">
+                <a:solidFill>
+                  <a:srgbClr val="3C78D8"/>
+                </a:solidFill>
+                <a:latin typeface="Calibri"/>
+                <a:ea typeface="Calibri"/>
+                <a:cs typeface="Calibri"/>
+                <a:sym typeface="Calibri"/>
+              </a:rPr>
+              <a:t>SKILD.AI model for robots</a:t>
+            </a:r>
+            <a:endParaRPr sz="1500" b="1">
+              <a:solidFill>
+                <a:srgbClr val="3C78D8"/>
+              </a:solidFill>
+              <a:latin typeface="Calibri"/>
+              <a:ea typeface="Calibri"/>
+              <a:cs typeface="Calibri"/>
+              <a:sym typeface="Calibri"/>
+            </a:endParaRPr>
+          </a:p>
+          <a:p>
+            <a:pPr marL="228600" marR="0" lvl="0" indent="-209550" algn="l" rtl="0">
+              <a:lnSpc>
+                <a:spcPct val="100000"/>
+              </a:lnSpc>
+              <a:spcBef>
+                <a:spcPts val="0"/>
+              </a:spcBef>
+              <a:spcAft>
+                <a:spcPts val="0"/>
+              </a:spcAft>
+              <a:buClr>
+                <a:srgbClr val="3C78D8"/>
+              </a:buClr>
+              <a:buSzPts val="1500"/>
+              <a:buFont typeface="Calibri"/>
+              <a:buChar char="●"/>
+            </a:pPr>
+            <a:r>
+              <a:rPr lang="en" sz="1500" b="1">
+                <a:solidFill>
+                  <a:srgbClr val="3C78D8"/>
+                </a:solidFill>
+                <a:latin typeface="Calibri"/>
+                <a:ea typeface="Calibri"/>
+                <a:cs typeface="Calibri"/>
+                <a:sym typeface="Calibri"/>
+              </a:rPr>
+              <a:t>Triplex - a SOTA LLM for Knowledge Graphs</a:t>
             </a:r>
             <a:endParaRPr sz="1500" b="1">
               <a:solidFill>
@@ -11461,7 +11664,7 @@
                 <a:cs typeface="Calibri"/>
                 <a:sym typeface="Calibri"/>
               </a:rPr>
-              <a:t>SKILD.AI model for robots</a:t>
+              <a:t>Ollama Tool Calling</a:t>
             </a:r>
             <a:endParaRPr sz="1500" b="1">
               <a:solidFill>
@@ -11501,7 +11704,7 @@
                 <a:cs typeface="Calibri"/>
                 <a:sym typeface="Calibri"/>
               </a:rPr>
-              <a:t>Triplex - a SOTA LLM for Knowledge Graphs</a:t>
+              <a:t>Nvidia Minitron 8B and 4B</a:t>
             </a:r>
             <a:endParaRPr sz="1500" b="1">
               <a:solidFill>
@@ -11541,7 +11744,7 @@
                 <a:cs typeface="Calibri"/>
                 <a:sym typeface="Calibri"/>
               </a:rPr>
-              <a:t>Nvidia Minitron 8B and 4B</a:t>
+              <a:t>Stability.ai Stable Video 4D</a:t>
             </a:r>
             <a:endParaRPr sz="1500" b="1">
               <a:solidFill>
@@ -11581,7 +11784,7 @@
                 <a:cs typeface="Calibri"/>
                 <a:sym typeface="Calibri"/>
               </a:rPr>
-              <a:t>Stability.ai Stable Video 4D</a:t>
+              <a:t>Mistral Large 2</a:t>
             </a:r>
             <a:endParaRPr sz="1500" b="1">
               <a:solidFill>
@@ -11621,7 +11824,7 @@
                 <a:cs typeface="Calibri"/>
                 <a:sym typeface="Calibri"/>
               </a:rPr>
-              <a:t>Mistral Large 2</a:t>
+              <a:t>Andrej Karpathy's YouTube playlist</a:t>
             </a:r>
             <a:endParaRPr sz="1500" b="1">
               <a:solidFill>
@@ -11661,7 +11864,7 @@
                 <a:cs typeface="Calibri"/>
                 <a:sym typeface="Calibri"/>
               </a:rPr>
-              <a:t>Andrej Karpathy's YouTube playlist</a:t>
+              <a:t>Yann LeCun: Fine-tuned Llama-3.1-8b vs GPT-4o</a:t>
             </a:r>
             <a:endParaRPr sz="1500" b="1">
               <a:solidFill>
@@ -11701,7 +11904,7 @@
                 <a:cs typeface="Calibri"/>
                 <a:sym typeface="Calibri"/>
               </a:rPr>
-              <a:t>Yann LeCun: Fine-tuned Llama-3.1-8b vs GPT-4o</a:t>
+              <a:t>PandasAI</a:t>
             </a:r>
             <a:endParaRPr sz="1500" b="1">
               <a:solidFill>
@@ -11741,7 +11944,7 @@
                 <a:cs typeface="Calibri"/>
                 <a:sym typeface="Calibri"/>
               </a:rPr>
-              <a:t>PandasAI</a:t>
+              <a:t>CARTE: Pretraining &amp; Transfer for Tabular Learning</a:t>
             </a:r>
             <a:endParaRPr sz="1500" b="1">
               <a:solidFill>
@@ -11781,7 +11984,7 @@
                 <a:cs typeface="Calibri"/>
                 <a:sym typeface="Calibri"/>
               </a:rPr>
-              <a:t>CARTE: Pretraining &amp; Transfer for Tabular Learning</a:t>
+              <a:t>Deepmind’s AlphaProof</a:t>
             </a:r>
             <a:endParaRPr sz="1500" b="1">
               <a:solidFill>
@@ -11821,7 +12024,7 @@
                 <a:cs typeface="Calibri"/>
                 <a:sym typeface="Calibri"/>
               </a:rPr>
-              <a:t>Deepmind’s AlphaProof</a:t>
+              <a:t>OpenAI GPT-4o Mini "instruction hierarchy"</a:t>
             </a:r>
             <a:endParaRPr sz="1500" b="1">
               <a:solidFill>
@@ -11861,7 +12064,7 @@
                 <a:cs typeface="Calibri"/>
                 <a:sym typeface="Calibri"/>
               </a:rPr>
-              <a:t>OpenAI GPT-4o Mini "instruction hierarchy"</a:t>
+              <a:t>OpenAI SearchGPT</a:t>
             </a:r>
             <a:endParaRPr sz="1500" b="1">
               <a:solidFill>
@@ -12003,7 +12206,7 @@
         </p:nvSpPr>
         <p:spPr>
           <a:xfrm>
-            <a:off x="2631225" y="-80050"/>
+            <a:off x="3302400" y="104975"/>
             <a:ext cx="2539200" cy="942000"/>
           </a:xfrm>
           <a:prstGeom prst="rect">
@@ -12121,8 +12324,8 @@
         </p:nvSpPr>
         <p:spPr>
           <a:xfrm>
-            <a:off x="7138225" y="343250"/>
-            <a:ext cx="1370100" cy="400200"/>
+            <a:off x="6848350" y="173025"/>
+            <a:ext cx="2205600" cy="831300"/>
           </a:xfrm>
           <a:prstGeom prst="rect">
             <a:avLst/>
@@ -12153,11 +12356,59 @@
                   <a:srgbClr val="FF0000"/>
                 </a:solidFill>
               </a:rPr>
-              <a:t>xxxx</a:t>
+              <a:t>"Remote jobs get </a:t>
             </a:r>
             <a:endParaRPr b="1" i="1">
               <a:solidFill>
                 <a:srgbClr val="FF0000"/>
+              </a:solidFill>
+            </a:endParaRPr>
+          </a:p>
+          <a:p>
+            <a:pPr marL="0" lvl="0" indent="0" algn="l" rtl="0">
+              <a:spcBef>
+                <a:spcPts val="0"/>
+              </a:spcBef>
+              <a:spcAft>
+                <a:spcPts val="0"/>
+              </a:spcAft>
+              <a:buNone/>
+            </a:pPr>
+            <a:r>
+              <a:rPr lang="en" b="1" i="1">
+                <a:solidFill>
+                  <a:srgbClr val="FF0000"/>
+                </a:solidFill>
+              </a:rPr>
+              <a:t>1,000 applicants each"</a:t>
+            </a:r>
+            <a:endParaRPr b="1" i="1">
+              <a:solidFill>
+                <a:srgbClr val="FF0000"/>
+              </a:solidFill>
+            </a:endParaRPr>
+          </a:p>
+          <a:p>
+            <a:pPr marL="0" lvl="0" indent="0" algn="l" rtl="0">
+              <a:spcBef>
+                <a:spcPts val="0"/>
+              </a:spcBef>
+              <a:spcAft>
+                <a:spcPts val="0"/>
+              </a:spcAft>
+              <a:buNone/>
+            </a:pPr>
+            <a:r>
+              <a:rPr lang="en" b="1" i="1">
+                <a:solidFill>
+                  <a:srgbClr val="6AA84F"/>
+                </a:solidFill>
+              </a:rPr>
+              <a:t>  - Dr. Derek Austin</a:t>
+            </a:r>
+            <a:endParaRPr b="1" i="1">
+              <a:solidFill>
+                <a:srgbClr val="6AA84F"/>
               </a:solidFill>
             </a:endParaRPr>
           </a:p>
@@ -12176,7 +12427,7 @@
   <p:cSld>
     <p:spTree>
       <p:nvGrpSpPr>
-        <p:cNvPr id="1" name="Shape 160"/>
+        <p:cNvPr id="1" name="Shape 154"/>
         <p:cNvGrpSpPr/>
         <p:nvPr/>
       </p:nvGrpSpPr>
@@ -12190,7 +12441,7 @@
       </p:grpSpPr>
       <p:sp>
         <p:nvSpPr>
-          <p:cNvPr id="161" name="Google Shape;161;p23"/>
+          <p:cNvPr id="155" name="Google Shape;155;p23"/>
           <p:cNvSpPr txBox="1"/>
           <p:nvPr/>
         </p:nvSpPr>
@@ -12237,9 +12488,626 @@
                 <a:cs typeface="Calibri"/>
                 <a:sym typeface="Calibri"/>
               </a:rPr>
-              <a:t>Misc 5</a:t>
+              <a:t>Misc 4</a:t>
             </a:r>
             <a:endParaRPr sz="2000" b="1">
+              <a:solidFill>
+                <a:schemeClr val="dk1"/>
+              </a:solidFill>
+              <a:latin typeface="Calibri"/>
+              <a:ea typeface="Calibri"/>
+              <a:cs typeface="Calibri"/>
+              <a:sym typeface="Calibri"/>
+            </a:endParaRPr>
+          </a:p>
+        </p:txBody>
+      </p:sp>
+      <p:sp>
+        <p:nvSpPr>
+          <p:cNvPr id="156" name="Google Shape;156;p23"/>
+          <p:cNvSpPr txBox="1"/>
+          <p:nvPr/>
+        </p:nvSpPr>
+        <p:spPr>
+          <a:xfrm>
+            <a:off x="70925" y="374800"/>
+            <a:ext cx="4478100" cy="618600"/>
+          </a:xfrm>
+          <a:prstGeom prst="rect">
+            <a:avLst/>
+          </a:prstGeom>
+          <a:solidFill>
+            <a:srgbClr val="FFF2CC"/>
+          </a:solidFill>
+          <a:ln w="9525" cap="flat" cmpd="sng">
+            <a:solidFill>
+              <a:srgbClr val="FF0000"/>
+            </a:solidFill>
+            <a:prstDash val="solid"/>
+            <a:round/>
+            <a:headEnd type="none" w="sm" len="sm"/>
+            <a:tailEnd type="none" w="sm" len="sm"/>
+          </a:ln>
+        </p:spPr>
+        <p:txBody>
+          <a:bodyPr spcFirstLastPara="1" wrap="square" lIns="9125" tIns="9125" rIns="9125" bIns="9125" anchor="t" anchorCtr="0">
+            <a:spAutoFit/>
+          </a:bodyPr>
+          <a:lstStyle/>
+          <a:p>
+            <a:pPr marL="0" lvl="0" indent="0" algn="l" rtl="0">
+              <a:spcBef>
+                <a:spcPts val="0"/>
+              </a:spcBef>
+              <a:spcAft>
+                <a:spcPts val="0"/>
+              </a:spcAft>
+              <a:buNone/>
+            </a:pPr>
+            <a:r>
+              <a:rPr lang="en" sz="1300" b="1">
+                <a:solidFill>
+                  <a:srgbClr val="FF0000"/>
+                </a:solidFill>
+                <a:latin typeface="Calibri"/>
+                <a:ea typeface="Calibri"/>
+                <a:cs typeface="Calibri"/>
+                <a:sym typeface="Calibri"/>
+              </a:rPr>
+              <a:t>Andrej Karpathy's YouTube playlist on Neural Networks</a:t>
+            </a:r>
+            <a:endParaRPr sz="1300">
+              <a:solidFill>
+                <a:schemeClr val="dk1"/>
+              </a:solidFill>
+              <a:latin typeface="Calibri"/>
+              <a:ea typeface="Calibri"/>
+              <a:cs typeface="Calibri"/>
+              <a:sym typeface="Calibri"/>
+            </a:endParaRPr>
+          </a:p>
+          <a:p>
+            <a:pPr marL="0" lvl="0" indent="0" algn="l" rtl="0">
+              <a:spcBef>
+                <a:spcPts val="0"/>
+              </a:spcBef>
+              <a:spcAft>
+                <a:spcPts val="0"/>
+              </a:spcAft>
+              <a:buNone/>
+            </a:pPr>
+            <a:r>
+              <a:rPr lang="en" sz="1300" u="sng">
+                <a:solidFill>
+                  <a:schemeClr val="hlink"/>
+                </a:solidFill>
+                <a:latin typeface="Calibri"/>
+                <a:ea typeface="Calibri"/>
+                <a:cs typeface="Calibri"/>
+                <a:sym typeface="Calibri"/>
+                <a:hlinkClick r:id="rId3"/>
+              </a:rPr>
+              <a:t>https://www.youtube.com/playlist?list=PLAqhIrjkxbuWI23v9cThsA9GvCAUhRvKZ</a:t>
+            </a:r>
+            <a:r>
+              <a:rPr lang="en" sz="1300">
+                <a:solidFill>
+                  <a:schemeClr val="dk1"/>
+                </a:solidFill>
+                <a:latin typeface="Calibri"/>
+                <a:ea typeface="Calibri"/>
+                <a:cs typeface="Calibri"/>
+                <a:sym typeface="Calibri"/>
+              </a:rPr>
+              <a:t> </a:t>
+            </a:r>
+            <a:endParaRPr sz="1300">
+              <a:solidFill>
+                <a:schemeClr val="dk1"/>
+              </a:solidFill>
+              <a:latin typeface="Calibri"/>
+              <a:ea typeface="Calibri"/>
+              <a:cs typeface="Calibri"/>
+              <a:sym typeface="Calibri"/>
+            </a:endParaRPr>
+          </a:p>
+        </p:txBody>
+      </p:sp>
+      <p:pic>
+        <p:nvPicPr>
+          <p:cNvPr id="157" name="Google Shape;157;p23"/>
+          <p:cNvPicPr preferRelativeResize="0"/>
+          <p:nvPr/>
+        </p:nvPicPr>
+        <p:blipFill>
+          <a:blip r:embed="rId4" cstate="email">
+            <a:alphaModFix/>
+            <a:extLst>
+              <a:ext uri="{28A0092B-C50C-407E-A947-70E740481C1C}">
+                <a14:useLocalDpi xmlns:a14="http://schemas.microsoft.com/office/drawing/2010/main"/>
+              </a:ext>
+            </a:extLst>
+          </a:blip>
+          <a:stretch>
+            <a:fillRect/>
+          </a:stretch>
+        </p:blipFill>
+        <p:spPr>
+          <a:xfrm>
+            <a:off x="76200" y="1041800"/>
+            <a:ext cx="4478100" cy="3271116"/>
+          </a:xfrm>
+          <a:prstGeom prst="rect">
+            <a:avLst/>
+          </a:prstGeom>
+          <a:noFill/>
+          <a:ln w="9525" cap="flat" cmpd="sng">
+            <a:solidFill>
+              <a:srgbClr val="FF0000"/>
+            </a:solidFill>
+            <a:prstDash val="solid"/>
+            <a:round/>
+            <a:headEnd type="none" w="sm" len="sm"/>
+            <a:tailEnd type="none" w="sm" len="sm"/>
+          </a:ln>
+        </p:spPr>
+      </p:pic>
+      <p:sp>
+        <p:nvSpPr>
+          <p:cNvPr id="158" name="Google Shape;158;p23"/>
+          <p:cNvSpPr txBox="1"/>
+          <p:nvPr/>
+        </p:nvSpPr>
+        <p:spPr>
+          <a:xfrm>
+            <a:off x="4615845" y="374800"/>
+            <a:ext cx="4478100" cy="818700"/>
+          </a:xfrm>
+          <a:prstGeom prst="rect">
+            <a:avLst/>
+          </a:prstGeom>
+          <a:solidFill>
+            <a:srgbClr val="FFF2CC"/>
+          </a:solidFill>
+          <a:ln w="9525" cap="flat" cmpd="sng">
+            <a:solidFill>
+              <a:srgbClr val="FF0000"/>
+            </a:solidFill>
+            <a:prstDash val="solid"/>
+            <a:round/>
+            <a:headEnd type="none" w="sm" len="sm"/>
+            <a:tailEnd type="none" w="sm" len="sm"/>
+          </a:ln>
+        </p:spPr>
+        <p:txBody>
+          <a:bodyPr spcFirstLastPara="1" wrap="square" lIns="9125" tIns="9125" rIns="9125" bIns="9125" anchor="t" anchorCtr="0">
+            <a:spAutoFit/>
+          </a:bodyPr>
+          <a:lstStyle/>
+          <a:p>
+            <a:pPr marL="0" lvl="0" indent="0" algn="l" rtl="0">
+              <a:spcBef>
+                <a:spcPts val="0"/>
+              </a:spcBef>
+              <a:spcAft>
+                <a:spcPts val="0"/>
+              </a:spcAft>
+              <a:buClr>
+                <a:schemeClr val="dk1"/>
+              </a:buClr>
+              <a:buSzPts val="1100"/>
+              <a:buFont typeface="Arial"/>
+              <a:buNone/>
+            </a:pPr>
+            <a:r>
+              <a:rPr lang="en" sz="1300" b="1">
+                <a:solidFill>
+                  <a:srgbClr val="FF0000"/>
+                </a:solidFill>
+                <a:latin typeface="Calibri"/>
+                <a:ea typeface="Calibri"/>
+                <a:cs typeface="Calibri"/>
+                <a:sym typeface="Calibri"/>
+              </a:rPr>
+              <a:t>Yann LeCun: Fine-tuned Llama 3.1 8B blows GPT-4o mini out of the water on every task.</a:t>
+            </a:r>
+            <a:r>
+              <a:rPr lang="en" sz="1300">
+                <a:solidFill>
+                  <a:schemeClr val="dk1"/>
+                </a:solidFill>
+                <a:latin typeface="Calibri"/>
+                <a:ea typeface="Calibri"/>
+                <a:cs typeface="Calibri"/>
+                <a:sym typeface="Calibri"/>
+              </a:rPr>
+              <a:t> </a:t>
+            </a:r>
+            <a:r>
+              <a:rPr lang="en" sz="1300" b="1">
+                <a:solidFill>
+                  <a:srgbClr val="3C78D8"/>
+                </a:solidFill>
+                <a:latin typeface="Calibri"/>
+                <a:ea typeface="Calibri"/>
+                <a:cs typeface="Calibri"/>
+                <a:sym typeface="Calibri"/>
+              </a:rPr>
+              <a:t>There has never been an open model this small, this good.</a:t>
+            </a:r>
+            <a:endParaRPr sz="1300" b="1">
+              <a:solidFill>
+                <a:srgbClr val="3C78D8"/>
+              </a:solidFill>
+              <a:latin typeface="Calibri"/>
+              <a:ea typeface="Calibri"/>
+              <a:cs typeface="Calibri"/>
+              <a:sym typeface="Calibri"/>
+            </a:endParaRPr>
+          </a:p>
+          <a:p>
+            <a:pPr marL="0" lvl="0" indent="0" algn="l" rtl="0">
+              <a:spcBef>
+                <a:spcPts val="0"/>
+              </a:spcBef>
+              <a:spcAft>
+                <a:spcPts val="0"/>
+              </a:spcAft>
+              <a:buNone/>
+            </a:pPr>
+            <a:r>
+              <a:rPr lang="en" sz="1300" u="sng">
+                <a:solidFill>
+                  <a:schemeClr val="hlink"/>
+                </a:solidFill>
+                <a:latin typeface="Calibri"/>
+                <a:ea typeface="Calibri"/>
+                <a:cs typeface="Calibri"/>
+                <a:sym typeface="Calibri"/>
+                <a:hlinkClick r:id="rId5"/>
+              </a:rPr>
+              <a:t>https://twitter.com/ylecun/status/1815858771610210756</a:t>
+            </a:r>
+            <a:r>
+              <a:rPr lang="en" sz="1300">
+                <a:solidFill>
+                  <a:schemeClr val="dk1"/>
+                </a:solidFill>
+                <a:latin typeface="Calibri"/>
+                <a:ea typeface="Calibri"/>
+                <a:cs typeface="Calibri"/>
+                <a:sym typeface="Calibri"/>
+              </a:rPr>
+              <a:t> </a:t>
+            </a:r>
+            <a:endParaRPr sz="1300">
+              <a:solidFill>
+                <a:schemeClr val="dk1"/>
+              </a:solidFill>
+              <a:latin typeface="Calibri"/>
+              <a:ea typeface="Calibri"/>
+              <a:cs typeface="Calibri"/>
+              <a:sym typeface="Calibri"/>
+            </a:endParaRPr>
+          </a:p>
+        </p:txBody>
+      </p:sp>
+      <p:sp>
+        <p:nvSpPr>
+          <p:cNvPr id="159" name="Google Shape;159;p23"/>
+          <p:cNvSpPr txBox="1"/>
+          <p:nvPr/>
+        </p:nvSpPr>
+        <p:spPr>
+          <a:xfrm>
+            <a:off x="4615845" y="1255425"/>
+            <a:ext cx="4478100" cy="618600"/>
+          </a:xfrm>
+          <a:prstGeom prst="rect">
+            <a:avLst/>
+          </a:prstGeom>
+          <a:solidFill>
+            <a:srgbClr val="FFF2CC"/>
+          </a:solidFill>
+          <a:ln w="9525" cap="flat" cmpd="sng">
+            <a:solidFill>
+              <a:srgbClr val="FF0000"/>
+            </a:solidFill>
+            <a:prstDash val="solid"/>
+            <a:round/>
+            <a:headEnd type="none" w="sm" len="sm"/>
+            <a:tailEnd type="none" w="sm" len="sm"/>
+          </a:ln>
+        </p:spPr>
+        <p:txBody>
+          <a:bodyPr spcFirstLastPara="1" wrap="square" lIns="9125" tIns="9125" rIns="9125" bIns="9125" anchor="t" anchorCtr="0">
+            <a:spAutoFit/>
+          </a:bodyPr>
+          <a:lstStyle/>
+          <a:p>
+            <a:pPr marL="0" lvl="0" indent="0" algn="l" rtl="0">
+              <a:spcBef>
+                <a:spcPts val="0"/>
+              </a:spcBef>
+              <a:spcAft>
+                <a:spcPts val="0"/>
+              </a:spcAft>
+              <a:buNone/>
+            </a:pPr>
+            <a:r>
+              <a:rPr lang="en" sz="1300" b="1">
+                <a:solidFill>
+                  <a:srgbClr val="FF0000"/>
+                </a:solidFill>
+                <a:latin typeface="Calibri"/>
+                <a:ea typeface="Calibri"/>
+                <a:cs typeface="Calibri"/>
+                <a:sym typeface="Calibri"/>
+              </a:rPr>
+              <a:t>PandasAI </a:t>
+            </a:r>
+            <a:r>
+              <a:rPr lang="en" sz="1300">
+                <a:solidFill>
+                  <a:schemeClr val="dk1"/>
+                </a:solidFill>
+                <a:latin typeface="Calibri"/>
+                <a:ea typeface="Calibri"/>
+                <a:cs typeface="Calibri"/>
+                <a:sym typeface="Calibri"/>
+              </a:rPr>
+              <a:t>is a Python platform that makes it easy to ask questions to your data in natural language.</a:t>
+            </a:r>
+            <a:endParaRPr sz="1300">
+              <a:solidFill>
+                <a:schemeClr val="dk1"/>
+              </a:solidFill>
+              <a:latin typeface="Calibri"/>
+              <a:ea typeface="Calibri"/>
+              <a:cs typeface="Calibri"/>
+              <a:sym typeface="Calibri"/>
+            </a:endParaRPr>
+          </a:p>
+          <a:p>
+            <a:pPr marL="0" lvl="0" indent="0" algn="l" rtl="0">
+              <a:spcBef>
+                <a:spcPts val="0"/>
+              </a:spcBef>
+              <a:spcAft>
+                <a:spcPts val="0"/>
+              </a:spcAft>
+              <a:buNone/>
+            </a:pPr>
+            <a:r>
+              <a:rPr lang="en" sz="1300" u="sng">
+                <a:solidFill>
+                  <a:schemeClr val="hlink"/>
+                </a:solidFill>
+                <a:latin typeface="Calibri"/>
+                <a:ea typeface="Calibri"/>
+                <a:cs typeface="Calibri"/>
+                <a:sym typeface="Calibri"/>
+                <a:hlinkClick r:id="rId6"/>
+              </a:rPr>
+              <a:t>https://github.com/Sinaptik-AI/pandas-ai</a:t>
+            </a:r>
+            <a:endParaRPr sz="1300">
+              <a:solidFill>
+                <a:schemeClr val="dk1"/>
+              </a:solidFill>
+              <a:latin typeface="Calibri"/>
+              <a:ea typeface="Calibri"/>
+              <a:cs typeface="Calibri"/>
+              <a:sym typeface="Calibri"/>
+            </a:endParaRPr>
+          </a:p>
+        </p:txBody>
+      </p:sp>
+      <p:pic>
+        <p:nvPicPr>
+          <p:cNvPr id="160" name="Google Shape;160;p23"/>
+          <p:cNvPicPr preferRelativeResize="0"/>
+          <p:nvPr/>
+        </p:nvPicPr>
+        <p:blipFill>
+          <a:blip r:embed="rId7" cstate="email">
+            <a:alphaModFix/>
+            <a:extLst>
+              <a:ext uri="{28A0092B-C50C-407E-A947-70E740481C1C}">
+                <a14:useLocalDpi xmlns:a14="http://schemas.microsoft.com/office/drawing/2010/main"/>
+              </a:ext>
+            </a:extLst>
+          </a:blip>
+          <a:stretch>
+            <a:fillRect/>
+          </a:stretch>
+        </p:blipFill>
+        <p:spPr>
+          <a:xfrm>
+            <a:off x="5946398" y="1943950"/>
+            <a:ext cx="2118501" cy="618600"/>
+          </a:xfrm>
+          <a:prstGeom prst="rect">
+            <a:avLst/>
+          </a:prstGeom>
+          <a:noFill/>
+          <a:ln>
+            <a:noFill/>
+          </a:ln>
+        </p:spPr>
+      </p:pic>
+      <p:sp>
+        <p:nvSpPr>
+          <p:cNvPr id="161" name="Google Shape;161;p23"/>
+          <p:cNvSpPr txBox="1"/>
+          <p:nvPr/>
+        </p:nvSpPr>
+        <p:spPr>
+          <a:xfrm>
+            <a:off x="4615845" y="2632475"/>
+            <a:ext cx="4478100" cy="680400"/>
+          </a:xfrm>
+          <a:prstGeom prst="rect">
+            <a:avLst/>
+          </a:prstGeom>
+          <a:solidFill>
+            <a:srgbClr val="FFF2CC"/>
+          </a:solidFill>
+          <a:ln w="9525" cap="flat" cmpd="sng">
+            <a:solidFill>
+              <a:srgbClr val="FF0000"/>
+            </a:solidFill>
+            <a:prstDash val="solid"/>
+            <a:round/>
+            <a:headEnd type="none" w="sm" len="sm"/>
+            <a:tailEnd type="none" w="sm" len="sm"/>
+          </a:ln>
+        </p:spPr>
+        <p:txBody>
+          <a:bodyPr spcFirstLastPara="1" wrap="square" lIns="9125" tIns="9125" rIns="9125" bIns="9125" anchor="t" anchorCtr="0">
+            <a:spAutoFit/>
+          </a:bodyPr>
+          <a:lstStyle/>
+          <a:p>
+            <a:pPr marL="0" lvl="0" indent="0" algn="l" rtl="0">
+              <a:spcBef>
+                <a:spcPts val="0"/>
+              </a:spcBef>
+              <a:spcAft>
+                <a:spcPts val="0"/>
+              </a:spcAft>
+              <a:buNone/>
+            </a:pPr>
+            <a:r>
+              <a:rPr lang="en" sz="1300" b="1">
+                <a:solidFill>
+                  <a:srgbClr val="FF0000"/>
+                </a:solidFill>
+                <a:latin typeface="Calibri"/>
+                <a:ea typeface="Calibri"/>
+                <a:cs typeface="Calibri"/>
+                <a:sym typeface="Calibri"/>
+              </a:rPr>
+              <a:t>CARTE: Pretraining and Transfer for Tabular Learning</a:t>
+            </a:r>
+            <a:endParaRPr sz="1300" b="1">
+              <a:solidFill>
+                <a:srgbClr val="FF0000"/>
+              </a:solidFill>
+              <a:latin typeface="Calibri"/>
+              <a:ea typeface="Calibri"/>
+              <a:cs typeface="Calibri"/>
+              <a:sym typeface="Calibri"/>
+            </a:endParaRPr>
+          </a:p>
+          <a:p>
+            <a:pPr marL="228600" lvl="0" indent="-120650" algn="l" rtl="0">
+              <a:spcBef>
+                <a:spcPts val="0"/>
+              </a:spcBef>
+              <a:spcAft>
+                <a:spcPts val="0"/>
+              </a:spcAft>
+              <a:buSzPts val="1000"/>
+              <a:buFont typeface="Calibri"/>
+              <a:buChar char="●"/>
+            </a:pPr>
+            <a:r>
+              <a:rPr lang="en" sz="1000" u="sng">
+                <a:solidFill>
+                  <a:schemeClr val="hlink"/>
+                </a:solidFill>
+                <a:latin typeface="Calibri"/>
+                <a:ea typeface="Calibri"/>
+                <a:cs typeface="Calibri"/>
+                <a:sym typeface="Calibri"/>
+                <a:hlinkClick r:id="rId8"/>
+              </a:rPr>
+              <a:t>https://arxiv.org/abs/2402.16785</a:t>
+            </a:r>
+            <a:endParaRPr sz="1000">
+              <a:solidFill>
+                <a:schemeClr val="dk1"/>
+              </a:solidFill>
+              <a:latin typeface="Calibri"/>
+              <a:ea typeface="Calibri"/>
+              <a:cs typeface="Calibri"/>
+              <a:sym typeface="Calibri"/>
+            </a:endParaRPr>
+          </a:p>
+          <a:p>
+            <a:pPr marL="228600" lvl="0" indent="-120650" algn="l" rtl="0">
+              <a:spcBef>
+                <a:spcPts val="0"/>
+              </a:spcBef>
+              <a:spcAft>
+                <a:spcPts val="0"/>
+              </a:spcAft>
+              <a:buSzPts val="1000"/>
+              <a:buFont typeface="Calibri"/>
+              <a:buChar char="●"/>
+            </a:pPr>
+            <a:r>
+              <a:rPr lang="en" sz="1000" u="sng">
+                <a:solidFill>
+                  <a:schemeClr val="hlink"/>
+                </a:solidFill>
+                <a:latin typeface="Calibri"/>
+                <a:ea typeface="Calibri"/>
+                <a:cs typeface="Calibri"/>
+                <a:sym typeface="Calibri"/>
+                <a:hlinkClick r:id="rId9"/>
+              </a:rPr>
+              <a:t>https://gael-varoquaux.info/science/carte-toward-table-foundation-models.html</a:t>
+            </a:r>
+            <a:endParaRPr sz="1000">
+              <a:solidFill>
+                <a:schemeClr val="dk1"/>
+              </a:solidFill>
+              <a:latin typeface="Calibri"/>
+              <a:ea typeface="Calibri"/>
+              <a:cs typeface="Calibri"/>
+              <a:sym typeface="Calibri"/>
+            </a:endParaRPr>
+          </a:p>
+          <a:p>
+            <a:pPr marL="228600" lvl="0" indent="-120650" algn="l" rtl="0">
+              <a:spcBef>
+                <a:spcPts val="0"/>
+              </a:spcBef>
+              <a:spcAft>
+                <a:spcPts val="0"/>
+              </a:spcAft>
+              <a:buSzPts val="1000"/>
+              <a:buFont typeface="Calibri"/>
+              <a:buChar char="●"/>
+            </a:pPr>
+            <a:r>
+              <a:rPr lang="en" sz="1000" u="sng">
+                <a:solidFill>
+                  <a:schemeClr val="hlink"/>
+                </a:solidFill>
+                <a:latin typeface="Calibri"/>
+                <a:ea typeface="Calibri"/>
+                <a:cs typeface="Calibri"/>
+                <a:sym typeface="Calibri"/>
+                <a:hlinkClick r:id="rId10"/>
+              </a:rPr>
+              <a:t>https://x.com/GaelVaroquaux/status/1814198479045931141</a:t>
+            </a:r>
+            <a:r>
+              <a:rPr lang="en" sz="1000">
+                <a:solidFill>
+                  <a:schemeClr val="dk1"/>
+                </a:solidFill>
+                <a:latin typeface="Calibri"/>
+                <a:ea typeface="Calibri"/>
+                <a:cs typeface="Calibri"/>
+                <a:sym typeface="Calibri"/>
+              </a:rPr>
+              <a:t>  </a:t>
+            </a:r>
+            <a:endParaRPr sz="1000">
               <a:solidFill>
                 <a:schemeClr val="dk1"/>
               </a:solidFill>
@@ -12259,7 +13127,344 @@
         </p:nvSpPr>
         <p:spPr>
           <a:xfrm>
-            <a:off x="70925" y="374800"/>
+            <a:off x="4615850" y="3386625"/>
+            <a:ext cx="2565000" cy="1095900"/>
+          </a:xfrm>
+          <a:prstGeom prst="rect">
+            <a:avLst/>
+          </a:prstGeom>
+          <a:solidFill>
+            <a:srgbClr val="FFF2CC"/>
+          </a:solidFill>
+          <a:ln w="9525" cap="flat" cmpd="sng">
+            <a:solidFill>
+              <a:srgbClr val="FF0000"/>
+            </a:solidFill>
+            <a:prstDash val="solid"/>
+            <a:round/>
+            <a:headEnd type="none" w="sm" len="sm"/>
+            <a:tailEnd type="none" w="sm" len="sm"/>
+          </a:ln>
+        </p:spPr>
+        <p:txBody>
+          <a:bodyPr spcFirstLastPara="1" wrap="square" lIns="9125" tIns="9125" rIns="9125" bIns="9125" anchor="t" anchorCtr="0">
+            <a:spAutoFit/>
+          </a:bodyPr>
+          <a:lstStyle/>
+          <a:p>
+            <a:pPr marL="0" lvl="0" indent="0" algn="l" rtl="0">
+              <a:spcBef>
+                <a:spcPts val="0"/>
+              </a:spcBef>
+              <a:spcAft>
+                <a:spcPts val="0"/>
+              </a:spcAft>
+              <a:buNone/>
+            </a:pPr>
+            <a:r>
+              <a:rPr lang="en" sz="1300" b="1">
+                <a:solidFill>
+                  <a:srgbClr val="FF0000"/>
+                </a:solidFill>
+                <a:latin typeface="Calibri"/>
+                <a:ea typeface="Calibri"/>
+                <a:cs typeface="Calibri"/>
+                <a:sym typeface="Calibri"/>
+              </a:rPr>
+              <a:t>Deepmind’s AlphaProof &amp; AlphaGeometry 2 </a:t>
+            </a:r>
+            <a:br>
+              <a:rPr lang="en" sz="1300" b="1">
+                <a:solidFill>
+                  <a:srgbClr val="FF0000"/>
+                </a:solidFill>
+                <a:latin typeface="Calibri"/>
+                <a:ea typeface="Calibri"/>
+                <a:cs typeface="Calibri"/>
+                <a:sym typeface="Calibri"/>
+              </a:rPr>
+            </a:br>
+            <a:r>
+              <a:rPr lang="en" sz="1300" b="1">
+                <a:solidFill>
+                  <a:srgbClr val="FF0000"/>
+                </a:solidFill>
+                <a:latin typeface="Calibri"/>
+                <a:ea typeface="Calibri"/>
+                <a:cs typeface="Calibri"/>
+                <a:sym typeface="Calibri"/>
+              </a:rPr>
+              <a:t>AlphaProof </a:t>
+            </a:r>
+            <a:r>
+              <a:rPr lang="en" sz="1300">
+                <a:solidFill>
+                  <a:schemeClr val="dk1"/>
+                </a:solidFill>
+                <a:latin typeface="Calibri"/>
+                <a:ea typeface="Calibri"/>
+                <a:cs typeface="Calibri"/>
+                <a:sym typeface="Calibri"/>
+              </a:rPr>
+              <a:t>scores silver in math olympiad</a:t>
+            </a:r>
+            <a:endParaRPr sz="1300">
+              <a:solidFill>
+                <a:schemeClr val="dk1"/>
+              </a:solidFill>
+              <a:latin typeface="Calibri"/>
+              <a:ea typeface="Calibri"/>
+              <a:cs typeface="Calibri"/>
+              <a:sym typeface="Calibri"/>
+            </a:endParaRPr>
+          </a:p>
+          <a:p>
+            <a:pPr marL="0" lvl="0" indent="0" algn="l" rtl="0">
+              <a:spcBef>
+                <a:spcPts val="0"/>
+              </a:spcBef>
+              <a:spcAft>
+                <a:spcPts val="0"/>
+              </a:spcAft>
+              <a:buNone/>
+            </a:pPr>
+            <a:r>
+              <a:rPr lang="en" sz="900" u="sng">
+                <a:solidFill>
+                  <a:schemeClr val="hlink"/>
+                </a:solidFill>
+                <a:latin typeface="Calibri"/>
+                <a:ea typeface="Calibri"/>
+                <a:cs typeface="Calibri"/>
+                <a:sym typeface="Calibri"/>
+                <a:hlinkClick r:id="rId11"/>
+              </a:rPr>
+              <a:t>https://deepmind.google/discover/blog/ai-solves-imo-problems-at-silver-medal-level/</a:t>
+            </a:r>
+            <a:r>
+              <a:rPr lang="en" sz="900">
+                <a:solidFill>
+                  <a:schemeClr val="dk1"/>
+                </a:solidFill>
+                <a:latin typeface="Calibri"/>
+                <a:ea typeface="Calibri"/>
+                <a:cs typeface="Calibri"/>
+                <a:sym typeface="Calibri"/>
+              </a:rPr>
+              <a:t> </a:t>
+            </a:r>
+            <a:endParaRPr sz="900">
+              <a:solidFill>
+                <a:schemeClr val="dk1"/>
+              </a:solidFill>
+              <a:latin typeface="Calibri"/>
+              <a:ea typeface="Calibri"/>
+              <a:cs typeface="Calibri"/>
+              <a:sym typeface="Calibri"/>
+            </a:endParaRPr>
+          </a:p>
+        </p:txBody>
+      </p:sp>
+      <p:grpSp>
+        <p:nvGrpSpPr>
+          <p:cNvPr id="163" name="Google Shape;163;p23"/>
+          <p:cNvGrpSpPr/>
+          <p:nvPr/>
+        </p:nvGrpSpPr>
+        <p:grpSpPr>
+          <a:xfrm>
+            <a:off x="7248294" y="3386625"/>
+            <a:ext cx="1845656" cy="1667374"/>
+            <a:chOff x="7248294" y="3386625"/>
+            <a:chExt cx="1845656" cy="1667374"/>
+          </a:xfrm>
+        </p:grpSpPr>
+        <p:pic>
+          <p:nvPicPr>
+            <p:cNvPr id="164" name="Google Shape;164;p23"/>
+            <p:cNvPicPr preferRelativeResize="0"/>
+            <p:nvPr/>
+          </p:nvPicPr>
+          <p:blipFill>
+            <a:blip r:embed="rId12" cstate="email">
+              <a:alphaModFix/>
+              <a:extLst>
+                <a:ext uri="{28A0092B-C50C-407E-A947-70E740481C1C}">
+                  <a14:useLocalDpi xmlns:a14="http://schemas.microsoft.com/office/drawing/2010/main"/>
+                </a:ext>
+              </a:extLst>
+            </a:blip>
+            <a:stretch>
+              <a:fillRect/>
+            </a:stretch>
+          </p:blipFill>
+          <p:spPr>
+            <a:xfrm>
+              <a:off x="7248294" y="3386625"/>
+              <a:ext cx="1845656" cy="1667374"/>
+            </a:xfrm>
+            <a:prstGeom prst="rect">
+              <a:avLst/>
+            </a:prstGeom>
+            <a:noFill/>
+            <a:ln w="9525" cap="flat" cmpd="sng">
+              <a:solidFill>
+                <a:srgbClr val="FF0000"/>
+              </a:solidFill>
+              <a:prstDash val="solid"/>
+              <a:round/>
+              <a:headEnd type="none" w="sm" len="sm"/>
+              <a:tailEnd type="none" w="sm" len="sm"/>
+            </a:ln>
+          </p:spPr>
+        </p:pic>
+        <p:sp>
+          <p:nvSpPr>
+            <p:cNvPr id="165" name="Google Shape;165;p23"/>
+            <p:cNvSpPr/>
+            <p:nvPr/>
+          </p:nvSpPr>
+          <p:spPr>
+            <a:xfrm rot="4557825">
+              <a:off x="8624096" y="3749686"/>
+              <a:ext cx="356236" cy="146831"/>
+            </a:xfrm>
+            <a:prstGeom prst="rightArrow">
+              <a:avLst>
+                <a:gd name="adj1" fmla="val 50000"/>
+                <a:gd name="adj2" fmla="val 50000"/>
+              </a:avLst>
+            </a:prstGeom>
+            <a:solidFill>
+              <a:srgbClr val="FF0000"/>
+            </a:solidFill>
+            <a:ln w="9525" cap="flat" cmpd="sng">
+              <a:solidFill>
+                <a:schemeClr val="dk2"/>
+              </a:solidFill>
+              <a:prstDash val="solid"/>
+              <a:round/>
+              <a:headEnd type="none" w="sm" len="sm"/>
+              <a:tailEnd type="none" w="sm" len="sm"/>
+            </a:ln>
+          </p:spPr>
+          <p:txBody>
+            <a:bodyPr spcFirstLastPara="1" wrap="square" lIns="91425" tIns="91425" rIns="91425" bIns="91425" anchor="ctr" anchorCtr="0">
+              <a:noAutofit/>
+            </a:bodyPr>
+            <a:lstStyle/>
+            <a:p>
+              <a:pPr marL="0" lvl="0" indent="0" algn="ctr" rtl="0">
+                <a:spcBef>
+                  <a:spcPts val="0"/>
+                </a:spcBef>
+                <a:spcAft>
+                  <a:spcPts val="0"/>
+                </a:spcAft>
+                <a:buNone/>
+              </a:pPr>
+              <a:endParaRPr/>
+            </a:p>
+          </p:txBody>
+        </p:sp>
+      </p:grpSp>
+    </p:spTree>
+  </p:cSld>
+  <p:clrMapOvr>
+    <a:masterClrMapping/>
+  </p:clrMapOvr>
+</p:sld>
+</file>
+
+<file path=ppt/slides/slide11.xml><?xml version="1.0" encoding="utf-8"?>
+<p:sld xmlns:a="http://schemas.openxmlformats.org/drawingml/2006/main" xmlns:r="http://schemas.openxmlformats.org/officeDocument/2006/relationships" xmlns:p="http://schemas.openxmlformats.org/presentationml/2006/main">
+  <p:cSld>
+    <p:spTree>
+      <p:nvGrpSpPr>
+        <p:cNvPr id="1" name="Shape 169"/>
+        <p:cNvGrpSpPr/>
+        <p:nvPr/>
+      </p:nvGrpSpPr>
+      <p:grpSpPr>
+        <a:xfrm>
+          <a:off x="0" y="0"/>
+          <a:ext cx="0" cy="0"/>
+          <a:chOff x="0" y="0"/>
+          <a:chExt cx="0" cy="0"/>
+        </a:xfrm>
+      </p:grpSpPr>
+      <p:sp>
+        <p:nvSpPr>
+          <p:cNvPr id="170" name="Google Shape;170;p24"/>
+          <p:cNvSpPr txBox="1"/>
+          <p:nvPr/>
+        </p:nvSpPr>
+        <p:spPr>
+          <a:xfrm>
+            <a:off x="76200" y="0"/>
+            <a:ext cx="1930200" cy="326400"/>
+          </a:xfrm>
+          <a:prstGeom prst="rect">
+            <a:avLst/>
+          </a:prstGeom>
+          <a:noFill/>
+          <a:ln>
+            <a:noFill/>
+          </a:ln>
+        </p:spPr>
+        <p:txBody>
+          <a:bodyPr spcFirstLastPara="1" wrap="square" lIns="9125" tIns="9125" rIns="9125" bIns="9125" anchor="t" anchorCtr="0">
+            <a:spAutoFit/>
+          </a:bodyPr>
+          <a:lstStyle/>
+          <a:p>
+            <a:pPr marL="0" lvl="0" indent="0" algn="l" rtl="0">
+              <a:spcBef>
+                <a:spcPts val="0"/>
+              </a:spcBef>
+              <a:spcAft>
+                <a:spcPts val="0"/>
+              </a:spcAft>
+              <a:buClr>
+                <a:schemeClr val="dk1"/>
+              </a:buClr>
+              <a:buSzPts val="1100"/>
+              <a:buFont typeface="Arial"/>
+              <a:buNone/>
+            </a:pPr>
+            <a:r>
+              <a:rPr lang="en" sz="2000" b="1">
+                <a:solidFill>
+                  <a:schemeClr val="dk1"/>
+                </a:solidFill>
+                <a:latin typeface="Calibri"/>
+                <a:ea typeface="Calibri"/>
+                <a:cs typeface="Calibri"/>
+                <a:sym typeface="Calibri"/>
+              </a:rPr>
+              <a:t>Misc 5</a:t>
+            </a:r>
+            <a:endParaRPr sz="2000" b="1">
+              <a:solidFill>
+                <a:schemeClr val="dk1"/>
+              </a:solidFill>
+              <a:latin typeface="Calibri"/>
+              <a:ea typeface="Calibri"/>
+              <a:cs typeface="Calibri"/>
+              <a:sym typeface="Calibri"/>
+            </a:endParaRPr>
+          </a:p>
+        </p:txBody>
+      </p:sp>
+      <p:sp>
+        <p:nvSpPr>
+          <p:cNvPr id="171" name="Google Shape;171;p24"/>
+          <p:cNvSpPr txBox="1"/>
+          <p:nvPr/>
+        </p:nvSpPr>
+        <p:spPr>
+          <a:xfrm>
+            <a:off x="70925" y="413675"/>
             <a:ext cx="4422600" cy="1018800"/>
           </a:xfrm>
           <a:prstGeom prst="rect">
@@ -12365,6 +13570,388 @@
           </a:p>
         </p:txBody>
       </p:sp>
+      <p:sp>
+        <p:nvSpPr>
+          <p:cNvPr id="172" name="Google Shape;172;p24"/>
+          <p:cNvSpPr txBox="1"/>
+          <p:nvPr/>
+        </p:nvSpPr>
+        <p:spPr>
+          <a:xfrm>
+            <a:off x="70925" y="1519750"/>
+            <a:ext cx="4422600" cy="418500"/>
+          </a:xfrm>
+          <a:prstGeom prst="rect">
+            <a:avLst/>
+          </a:prstGeom>
+          <a:solidFill>
+            <a:srgbClr val="FFF2CC"/>
+          </a:solidFill>
+          <a:ln w="9525" cap="flat" cmpd="sng">
+            <a:solidFill>
+              <a:srgbClr val="FF0000"/>
+            </a:solidFill>
+            <a:prstDash val="solid"/>
+            <a:round/>
+            <a:headEnd type="none" w="sm" len="sm"/>
+            <a:tailEnd type="none" w="sm" len="sm"/>
+          </a:ln>
+        </p:spPr>
+        <p:txBody>
+          <a:bodyPr spcFirstLastPara="1" wrap="square" lIns="9125" tIns="9125" rIns="9125" bIns="9125" anchor="t" anchorCtr="0">
+            <a:spAutoFit/>
+          </a:bodyPr>
+          <a:lstStyle/>
+          <a:p>
+            <a:pPr marL="0" lvl="0" indent="0" algn="l" rtl="0">
+              <a:spcBef>
+                <a:spcPts val="0"/>
+              </a:spcBef>
+              <a:spcAft>
+                <a:spcPts val="0"/>
+              </a:spcAft>
+              <a:buNone/>
+            </a:pPr>
+            <a:r>
+              <a:rPr lang="en" sz="1300" b="1">
+                <a:solidFill>
+                  <a:srgbClr val="FF0000"/>
+                </a:solidFill>
+                <a:latin typeface="Calibri"/>
+                <a:ea typeface="Calibri"/>
+                <a:cs typeface="Calibri"/>
+                <a:sym typeface="Calibri"/>
+              </a:rPr>
+              <a:t>OpenAI SearchGPT </a:t>
+            </a:r>
+            <a:r>
+              <a:rPr lang="en" sz="1300">
+                <a:solidFill>
+                  <a:schemeClr val="dk1"/>
+                </a:solidFill>
+                <a:latin typeface="Calibri"/>
+                <a:ea typeface="Calibri"/>
+                <a:cs typeface="Calibri"/>
+                <a:sym typeface="Calibri"/>
+              </a:rPr>
+              <a:t>- blends traditional web searches with AI capabilities. Is launched for testing.</a:t>
+            </a:r>
+            <a:endParaRPr sz="1300">
+              <a:solidFill>
+                <a:schemeClr val="dk1"/>
+              </a:solidFill>
+              <a:latin typeface="Calibri"/>
+              <a:ea typeface="Calibri"/>
+              <a:cs typeface="Calibri"/>
+              <a:sym typeface="Calibri"/>
+            </a:endParaRPr>
+          </a:p>
+        </p:txBody>
+      </p:sp>
+      <p:sp>
+        <p:nvSpPr>
+          <p:cNvPr id="173" name="Google Shape;173;p24"/>
+          <p:cNvSpPr txBox="1"/>
+          <p:nvPr/>
+        </p:nvSpPr>
+        <p:spPr>
+          <a:xfrm>
+            <a:off x="70925" y="2025525"/>
+            <a:ext cx="4422600" cy="695700"/>
+          </a:xfrm>
+          <a:prstGeom prst="rect">
+            <a:avLst/>
+          </a:prstGeom>
+          <a:solidFill>
+            <a:srgbClr val="FFF2CC"/>
+          </a:solidFill>
+          <a:ln w="9525" cap="flat" cmpd="sng">
+            <a:solidFill>
+              <a:srgbClr val="FF0000"/>
+            </a:solidFill>
+            <a:prstDash val="solid"/>
+            <a:round/>
+            <a:headEnd type="none" w="sm" len="sm"/>
+            <a:tailEnd type="none" w="sm" len="sm"/>
+          </a:ln>
+        </p:spPr>
+        <p:txBody>
+          <a:bodyPr spcFirstLastPara="1" wrap="square" lIns="9125" tIns="9125" rIns="9125" bIns="9125" anchor="t" anchorCtr="0">
+            <a:spAutoFit/>
+          </a:bodyPr>
+          <a:lstStyle/>
+          <a:p>
+            <a:pPr marL="0" lvl="0" indent="0" algn="l" rtl="0">
+              <a:spcBef>
+                <a:spcPts val="0"/>
+              </a:spcBef>
+              <a:spcAft>
+                <a:spcPts val="0"/>
+              </a:spcAft>
+              <a:buNone/>
+            </a:pPr>
+            <a:r>
+              <a:rPr lang="en" sz="1300">
+                <a:solidFill>
+                  <a:schemeClr val="dk1"/>
+                </a:solidFill>
+                <a:latin typeface="Calibri"/>
+                <a:ea typeface="Calibri"/>
+                <a:cs typeface="Calibri"/>
+                <a:sym typeface="Calibri"/>
+              </a:rPr>
+              <a:t>Microsoft is adding </a:t>
+            </a:r>
+            <a:r>
+              <a:rPr lang="en" sz="1300" b="1">
+                <a:solidFill>
+                  <a:srgbClr val="FF0000"/>
+                </a:solidFill>
+                <a:latin typeface="Calibri"/>
+                <a:ea typeface="Calibri"/>
+                <a:cs typeface="Calibri"/>
+                <a:sym typeface="Calibri"/>
+              </a:rPr>
+              <a:t>AI-powered summaries to Bing search</a:t>
+            </a:r>
+            <a:r>
+              <a:rPr lang="en" sz="1300">
+                <a:solidFill>
+                  <a:schemeClr val="dk1"/>
+                </a:solidFill>
+                <a:latin typeface="Calibri"/>
+                <a:ea typeface="Calibri"/>
+                <a:cs typeface="Calibri"/>
+                <a:sym typeface="Calibri"/>
+              </a:rPr>
+              <a:t> results. </a:t>
+            </a:r>
+            <a:r>
+              <a:rPr lang="en" sz="900" u="sng">
+                <a:solidFill>
+                  <a:schemeClr val="hlink"/>
+                </a:solidFill>
+                <a:latin typeface="Calibri"/>
+                <a:ea typeface="Calibri"/>
+                <a:cs typeface="Calibri"/>
+                <a:sym typeface="Calibri"/>
+                <a:hlinkClick r:id="rId3"/>
+              </a:rPr>
+              <a:t>https://www.engadget.com/microsoft-is-adding-ai-powered-summaries-to-bing-search-results-203053790.html</a:t>
+            </a:r>
+            <a:r>
+              <a:rPr lang="en" sz="900">
+                <a:solidFill>
+                  <a:schemeClr val="dk1"/>
+                </a:solidFill>
+                <a:latin typeface="Calibri"/>
+                <a:ea typeface="Calibri"/>
+                <a:cs typeface="Calibri"/>
+                <a:sym typeface="Calibri"/>
+              </a:rPr>
+              <a:t> </a:t>
+            </a:r>
+            <a:endParaRPr sz="900">
+              <a:solidFill>
+                <a:schemeClr val="dk1"/>
+              </a:solidFill>
+              <a:latin typeface="Calibri"/>
+              <a:ea typeface="Calibri"/>
+              <a:cs typeface="Calibri"/>
+              <a:sym typeface="Calibri"/>
+            </a:endParaRPr>
+          </a:p>
+        </p:txBody>
+      </p:sp>
+      <p:sp>
+        <p:nvSpPr>
+          <p:cNvPr id="174" name="Google Shape;174;p24"/>
+          <p:cNvSpPr txBox="1"/>
+          <p:nvPr/>
+        </p:nvSpPr>
+        <p:spPr>
+          <a:xfrm>
+            <a:off x="70925" y="2808500"/>
+            <a:ext cx="4422600" cy="726600"/>
+          </a:xfrm>
+          <a:prstGeom prst="rect">
+            <a:avLst/>
+          </a:prstGeom>
+          <a:solidFill>
+            <a:srgbClr val="FFF2CC"/>
+          </a:solidFill>
+          <a:ln w="9525" cap="flat" cmpd="sng">
+            <a:solidFill>
+              <a:srgbClr val="FF0000"/>
+            </a:solidFill>
+            <a:prstDash val="solid"/>
+            <a:round/>
+            <a:headEnd type="none" w="sm" len="sm"/>
+            <a:tailEnd type="none" w="sm" len="sm"/>
+          </a:ln>
+        </p:spPr>
+        <p:txBody>
+          <a:bodyPr spcFirstLastPara="1" wrap="square" lIns="9125" tIns="9125" rIns="9125" bIns="9125" anchor="t" anchorCtr="0">
+            <a:spAutoFit/>
+          </a:bodyPr>
+          <a:lstStyle/>
+          <a:p>
+            <a:pPr marL="0" lvl="0" indent="0" algn="l" rtl="0">
+              <a:spcBef>
+                <a:spcPts val="0"/>
+              </a:spcBef>
+              <a:spcAft>
+                <a:spcPts val="0"/>
+              </a:spcAft>
+              <a:buNone/>
+            </a:pPr>
+            <a:r>
+              <a:rPr lang="en" sz="1300" b="1">
+                <a:solidFill>
+                  <a:srgbClr val="FF0000"/>
+                </a:solidFill>
+                <a:latin typeface="Calibri"/>
+                <a:ea typeface="Calibri"/>
+                <a:cs typeface="Calibri"/>
+                <a:sym typeface="Calibri"/>
+              </a:rPr>
+              <a:t>Grammarly is dead.</a:t>
+            </a:r>
+            <a:r>
+              <a:rPr lang="en" sz="1300">
+                <a:solidFill>
+                  <a:schemeClr val="dk1"/>
+                </a:solidFill>
+                <a:latin typeface="Calibri"/>
+                <a:ea typeface="Calibri"/>
+                <a:cs typeface="Calibri"/>
+                <a:sym typeface="Calibri"/>
+              </a:rPr>
+              <a:t> Apple Just Completely Wrecked Grammarly with Apple Intelligence</a:t>
+            </a:r>
+            <a:endParaRPr sz="1300">
+              <a:solidFill>
+                <a:schemeClr val="dk1"/>
+              </a:solidFill>
+              <a:latin typeface="Calibri"/>
+              <a:ea typeface="Calibri"/>
+              <a:cs typeface="Calibri"/>
+              <a:sym typeface="Calibri"/>
+            </a:endParaRPr>
+          </a:p>
+          <a:p>
+            <a:pPr marL="0" lvl="0" indent="0" algn="l" rtl="0">
+              <a:spcBef>
+                <a:spcPts val="0"/>
+              </a:spcBef>
+              <a:spcAft>
+                <a:spcPts val="0"/>
+              </a:spcAft>
+              <a:buNone/>
+            </a:pPr>
+            <a:r>
+              <a:rPr lang="en" sz="1000" u="sng">
+                <a:solidFill>
+                  <a:schemeClr val="hlink"/>
+                </a:solidFill>
+                <a:latin typeface="Calibri"/>
+                <a:ea typeface="Calibri"/>
+                <a:cs typeface="Calibri"/>
+                <a:sym typeface="Calibri"/>
+                <a:hlinkClick r:id="rId4"/>
+              </a:rPr>
+              <a:t>https://medium.com/swlh/apple-just-completely-wrecked-grammarly-with-apple-intelligence-ea9bdc27c317</a:t>
+            </a:r>
+            <a:r>
+              <a:rPr lang="en" sz="1000">
+                <a:solidFill>
+                  <a:schemeClr val="dk1"/>
+                </a:solidFill>
+                <a:latin typeface="Calibri"/>
+                <a:ea typeface="Calibri"/>
+                <a:cs typeface="Calibri"/>
+                <a:sym typeface="Calibri"/>
+              </a:rPr>
+              <a:t> </a:t>
+            </a:r>
+            <a:endParaRPr sz="1000">
+              <a:solidFill>
+                <a:schemeClr val="dk1"/>
+              </a:solidFill>
+              <a:latin typeface="Calibri"/>
+              <a:ea typeface="Calibri"/>
+              <a:cs typeface="Calibri"/>
+              <a:sym typeface="Calibri"/>
+            </a:endParaRPr>
+          </a:p>
+        </p:txBody>
+      </p:sp>
+      <p:sp>
+        <p:nvSpPr>
+          <p:cNvPr id="175" name="Google Shape;175;p24"/>
+          <p:cNvSpPr txBox="1"/>
+          <p:nvPr/>
+        </p:nvSpPr>
+        <p:spPr>
+          <a:xfrm>
+            <a:off x="70925" y="3622375"/>
+            <a:ext cx="4422600" cy="218400"/>
+          </a:xfrm>
+          <a:prstGeom prst="rect">
+            <a:avLst/>
+          </a:prstGeom>
+          <a:solidFill>
+            <a:srgbClr val="FFF2CC"/>
+          </a:solidFill>
+          <a:ln w="9525" cap="flat" cmpd="sng">
+            <a:solidFill>
+              <a:srgbClr val="FF0000"/>
+            </a:solidFill>
+            <a:prstDash val="solid"/>
+            <a:round/>
+            <a:headEnd type="none" w="sm" len="sm"/>
+            <a:tailEnd type="none" w="sm" len="sm"/>
+          </a:ln>
+        </p:spPr>
+        <p:txBody>
+          <a:bodyPr spcFirstLastPara="1" wrap="square" lIns="9125" tIns="9125" rIns="9125" bIns="9125" anchor="t" anchorCtr="0">
+            <a:spAutoFit/>
+          </a:bodyPr>
+          <a:lstStyle/>
+          <a:p>
+            <a:pPr marL="0" lvl="0" indent="0" algn="l" rtl="0">
+              <a:spcBef>
+                <a:spcPts val="0"/>
+              </a:spcBef>
+              <a:spcAft>
+                <a:spcPts val="0"/>
+              </a:spcAft>
+              <a:buNone/>
+            </a:pPr>
+            <a:r>
+              <a:rPr lang="en" sz="1300">
+                <a:solidFill>
+                  <a:schemeClr val="dk1"/>
+                </a:solidFill>
+                <a:latin typeface="Calibri"/>
+                <a:ea typeface="Calibri"/>
+                <a:cs typeface="Calibri"/>
+                <a:sym typeface="Calibri"/>
+              </a:rPr>
+              <a:t>Run models in Browser</a:t>
+            </a:r>
+            <a:endParaRPr sz="1000">
+              <a:solidFill>
+                <a:schemeClr val="dk1"/>
+              </a:solidFill>
+              <a:latin typeface="Calibri"/>
+              <a:ea typeface="Calibri"/>
+              <a:cs typeface="Calibri"/>
+              <a:sym typeface="Calibri"/>
+            </a:endParaRPr>
+          </a:p>
+        </p:txBody>
+      </p:sp>
     </p:spTree>
   </p:cSld>
   <p:clrMapOvr>
@@ -12373,12 +13960,12 @@
 </p:sld>
 </file>
 
-<file path=ppt/slides/slide11.xml><?xml version="1.0" encoding="utf-8"?>
+<file path=ppt/slides/slide12.xml><?xml version="1.0" encoding="utf-8"?>
 <p:sld xmlns:a="http://schemas.openxmlformats.org/drawingml/2006/main" xmlns:r="http://schemas.openxmlformats.org/officeDocument/2006/relationships" xmlns:p="http://schemas.openxmlformats.org/presentationml/2006/main">
   <p:cSld>
     <p:spTree>
       <p:nvGrpSpPr>
-        <p:cNvPr id="1" name="Shape 166"/>
+        <p:cNvPr id="1" name="Shape 179"/>
         <p:cNvGrpSpPr/>
         <p:nvPr/>
       </p:nvGrpSpPr>
@@ -12392,7 +13979,7 @@
       </p:grpSpPr>
       <p:sp>
         <p:nvSpPr>
-          <p:cNvPr id="167" name="Google Shape;167;p24"/>
+          <p:cNvPr id="180" name="Google Shape;180;p25"/>
           <p:cNvSpPr txBox="1"/>
           <p:nvPr/>
         </p:nvSpPr>
@@ -12455,7 +14042,7 @@
       </p:sp>
       <p:sp>
         <p:nvSpPr>
-          <p:cNvPr id="168" name="Google Shape;168;p24"/>
+          <p:cNvPr id="181" name="Google Shape;181;p25"/>
           <p:cNvSpPr txBox="1"/>
           <p:nvPr/>
         </p:nvSpPr>
@@ -12707,7 +14294,7 @@
       </p:sp>
       <p:pic>
         <p:nvPicPr>
-          <p:cNvPr id="169" name="Google Shape;169;p24"/>
+          <p:cNvPr id="182" name="Google Shape;182;p25"/>
           <p:cNvPicPr preferRelativeResize="0"/>
           <p:nvPr/>
         </p:nvPicPr>
@@ -12746,7 +14333,7 @@
       </p:pic>
       <p:pic>
         <p:nvPicPr>
-          <p:cNvPr id="170" name="Google Shape;170;p24"/>
+          <p:cNvPr id="183" name="Google Shape;183;p25"/>
           <p:cNvPicPr preferRelativeResize="0"/>
           <p:nvPr/>
         </p:nvPicPr>
@@ -12778,7 +14365,7 @@
       </p:pic>
       <p:pic>
         <p:nvPicPr>
-          <p:cNvPr id="171" name="Google Shape;171;p24"/>
+          <p:cNvPr id="184" name="Google Shape;184;p25"/>
           <p:cNvPicPr preferRelativeResize="0"/>
           <p:nvPr/>
         </p:nvPicPr>
@@ -12817,7 +14404,7 @@
       </p:pic>
       <p:sp>
         <p:nvSpPr>
-          <p:cNvPr id="172" name="Google Shape;172;p24"/>
+          <p:cNvPr id="185" name="Google Shape;185;p25"/>
           <p:cNvSpPr txBox="1"/>
           <p:nvPr/>
         </p:nvSpPr>
@@ -13251,12 +14838,12 @@
 </p:sld>
 </file>
 
-<file path=ppt/slides/slide12.xml><?xml version="1.0" encoding="utf-8"?>
+<file path=ppt/slides/slide13.xml><?xml version="1.0" encoding="utf-8"?>
 <p:sld xmlns:a="http://schemas.openxmlformats.org/drawingml/2006/main" xmlns:r="http://schemas.openxmlformats.org/officeDocument/2006/relationships" xmlns:p="http://schemas.openxmlformats.org/presentationml/2006/main">
   <p:cSld>
     <p:spTree>
       <p:nvGrpSpPr>
-        <p:cNvPr id="1" name="Shape 176"/>
+        <p:cNvPr id="1" name="Shape 189"/>
         <p:cNvGrpSpPr/>
         <p:nvPr/>
       </p:nvGrpSpPr>
@@ -13270,7 +14857,7 @@
       </p:grpSpPr>
       <p:sp>
         <p:nvSpPr>
-          <p:cNvPr id="177" name="Google Shape;177;p25"/>
+          <p:cNvPr id="190" name="Google Shape;190;p26"/>
           <p:cNvSpPr txBox="1"/>
           <p:nvPr/>
         </p:nvSpPr>
@@ -13431,7 +15018,7 @@
       </p:sp>
       <p:sp>
         <p:nvSpPr>
-          <p:cNvPr id="178" name="Google Shape;178;p25"/>
+          <p:cNvPr id="191" name="Google Shape;191;p26"/>
           <p:cNvSpPr txBox="1"/>
           <p:nvPr/>
         </p:nvSpPr>
@@ -13545,7 +15132,7 @@
       </p:sp>
       <p:sp>
         <p:nvSpPr>
-          <p:cNvPr id="179" name="Google Shape;179;p25"/>
+          <p:cNvPr id="192" name="Google Shape;192;p26"/>
           <p:cNvSpPr txBox="1"/>
           <p:nvPr/>
         </p:nvSpPr>
@@ -13611,7 +15198,7 @@
       </p:sp>
       <p:sp>
         <p:nvSpPr>
-          <p:cNvPr id="180" name="Google Shape;180;p25"/>
+          <p:cNvPr id="193" name="Google Shape;193;p26"/>
           <p:cNvSpPr txBox="1"/>
           <p:nvPr/>
         </p:nvSpPr>
@@ -13702,7 +15289,7 @@
       </p:sp>
       <p:sp>
         <p:nvSpPr>
-          <p:cNvPr id="181" name="Google Shape;181;p25"/>
+          <p:cNvPr id="194" name="Google Shape;194;p26"/>
           <p:cNvSpPr txBox="1"/>
           <p:nvPr/>
         </p:nvSpPr>
@@ -13776,7 +15363,7 @@
       </p:sp>
       <p:sp>
         <p:nvSpPr>
-          <p:cNvPr id="182" name="Google Shape;182;p25"/>
+          <p:cNvPr id="195" name="Google Shape;195;p26"/>
           <p:cNvSpPr/>
           <p:nvPr/>
         </p:nvSpPr>
@@ -13822,7 +15409,7 @@
       </p:sp>
       <p:sp>
         <p:nvSpPr>
-          <p:cNvPr id="183" name="Google Shape;183;p25"/>
+          <p:cNvPr id="196" name="Google Shape;196;p26"/>
           <p:cNvSpPr/>
           <p:nvPr/>
         </p:nvSpPr>
@@ -13868,7 +15455,7 @@
       </p:sp>
       <p:sp>
         <p:nvSpPr>
-          <p:cNvPr id="184" name="Google Shape;184;p25"/>
+          <p:cNvPr id="197" name="Google Shape;197;p26"/>
           <p:cNvSpPr/>
           <p:nvPr/>
         </p:nvSpPr>
@@ -13914,7 +15501,7 @@
       </p:sp>
       <p:sp>
         <p:nvSpPr>
-          <p:cNvPr id="185" name="Google Shape;185;p25"/>
+          <p:cNvPr id="198" name="Google Shape;198;p26"/>
           <p:cNvSpPr/>
           <p:nvPr/>
         </p:nvSpPr>
@@ -13964,7 +15551,7 @@
       </p:sp>
       <p:sp>
         <p:nvSpPr>
-          <p:cNvPr id="186" name="Google Shape;186;p25"/>
+          <p:cNvPr id="199" name="Google Shape;199;p26"/>
           <p:cNvSpPr/>
           <p:nvPr/>
         </p:nvSpPr>
@@ -14010,7 +15597,7 @@
       </p:sp>
       <p:sp>
         <p:nvSpPr>
-          <p:cNvPr id="187" name="Google Shape;187;p25"/>
+          <p:cNvPr id="200" name="Google Shape;200;p26"/>
           <p:cNvSpPr/>
           <p:nvPr/>
         </p:nvSpPr>
@@ -14056,7 +15643,7 @@
       </p:sp>
       <p:sp>
         <p:nvSpPr>
-          <p:cNvPr id="188" name="Google Shape;188;p25"/>
+          <p:cNvPr id="201" name="Google Shape;201;p26"/>
           <p:cNvSpPr/>
           <p:nvPr/>
         </p:nvSpPr>
@@ -14102,7 +15689,7 @@
       </p:sp>
       <p:sp>
         <p:nvSpPr>
-          <p:cNvPr id="189" name="Google Shape;189;p25"/>
+          <p:cNvPr id="202" name="Google Shape;202;p26"/>
           <p:cNvSpPr/>
           <p:nvPr/>
         </p:nvSpPr>
@@ -14148,7 +15735,7 @@
       </p:sp>
       <p:sp>
         <p:nvSpPr>
-          <p:cNvPr id="190" name="Google Shape;190;p25"/>
+          <p:cNvPr id="203" name="Google Shape;203;p26"/>
           <p:cNvSpPr/>
           <p:nvPr/>
         </p:nvSpPr>
@@ -14194,7 +15781,7 @@
       </p:sp>
       <p:sp>
         <p:nvSpPr>
-          <p:cNvPr id="191" name="Google Shape;191;p25"/>
+          <p:cNvPr id="204" name="Google Shape;204;p26"/>
           <p:cNvSpPr/>
           <p:nvPr/>
         </p:nvSpPr>
@@ -14240,7 +15827,7 @@
       </p:sp>
       <p:sp>
         <p:nvSpPr>
-          <p:cNvPr id="192" name="Google Shape;192;p25"/>
+          <p:cNvPr id="205" name="Google Shape;205;p26"/>
           <p:cNvSpPr/>
           <p:nvPr/>
         </p:nvSpPr>
@@ -14286,7 +15873,7 @@
       </p:sp>
       <p:pic>
         <p:nvPicPr>
-          <p:cNvPr id="193" name="Google Shape;193;p25"/>
+          <p:cNvPr id="206" name="Google Shape;206;p26"/>
           <p:cNvPicPr preferRelativeResize="0"/>
           <p:nvPr/>
         </p:nvPicPr>
@@ -14325,7 +15912,7 @@
       </p:pic>
       <p:sp>
         <p:nvSpPr>
-          <p:cNvPr id="194" name="Google Shape;194;p25"/>
+          <p:cNvPr id="207" name="Google Shape;207;p26"/>
           <p:cNvSpPr/>
           <p:nvPr/>
         </p:nvSpPr>
@@ -14371,7 +15958,7 @@
       </p:sp>
       <p:pic>
         <p:nvPicPr>
-          <p:cNvPr id="195" name="Google Shape;195;p25"/>
+          <p:cNvPr id="208" name="Google Shape;208;p26"/>
           <p:cNvPicPr preferRelativeResize="0"/>
           <p:nvPr/>
         </p:nvPicPr>
@@ -14416,12 +16003,12 @@
 </p:sld>
 </file>
 
-<file path=ppt/slides/slide13.xml><?xml version="1.0" encoding="utf-8"?>
+<file path=ppt/slides/slide14.xml><?xml version="1.0" encoding="utf-8"?>
 <p:sld xmlns:a="http://schemas.openxmlformats.org/drawingml/2006/main" xmlns:r="http://schemas.openxmlformats.org/officeDocument/2006/relationships" xmlns:p="http://schemas.openxmlformats.org/presentationml/2006/main">
   <p:cSld>
     <p:spTree>
       <p:nvGrpSpPr>
-        <p:cNvPr id="1" name="Shape 199"/>
+        <p:cNvPr id="1" name="Shape 212"/>
         <p:cNvGrpSpPr/>
         <p:nvPr/>
       </p:nvGrpSpPr>
@@ -14435,7 +16022,7 @@
       </p:grpSpPr>
       <p:sp>
         <p:nvSpPr>
-          <p:cNvPr id="200" name="Google Shape;200;p26"/>
+          <p:cNvPr id="213" name="Google Shape;213;p27"/>
           <p:cNvSpPr txBox="1"/>
           <p:nvPr/>
         </p:nvSpPr>
@@ -14596,7 +16183,7 @@
       </p:sp>
       <p:sp>
         <p:nvSpPr>
-          <p:cNvPr id="201" name="Google Shape;201;p26"/>
+          <p:cNvPr id="214" name="Google Shape;214;p27"/>
           <p:cNvSpPr txBox="1"/>
           <p:nvPr/>
         </p:nvSpPr>
@@ -14710,7 +16297,7 @@
       </p:sp>
       <p:sp>
         <p:nvSpPr>
-          <p:cNvPr id="202" name="Google Shape;202;p26"/>
+          <p:cNvPr id="215" name="Google Shape;215;p27"/>
           <p:cNvSpPr txBox="1"/>
           <p:nvPr/>
         </p:nvSpPr>
@@ -14776,7 +16363,7 @@
       </p:sp>
       <p:sp>
         <p:nvSpPr>
-          <p:cNvPr id="203" name="Google Shape;203;p26"/>
+          <p:cNvPr id="216" name="Google Shape;216;p27"/>
           <p:cNvSpPr txBox="1"/>
           <p:nvPr/>
         </p:nvSpPr>
@@ -14867,7 +16454,7 @@
       </p:sp>
       <p:sp>
         <p:nvSpPr>
-          <p:cNvPr id="204" name="Google Shape;204;p26"/>
+          <p:cNvPr id="217" name="Google Shape;217;p27"/>
           <p:cNvSpPr txBox="1"/>
           <p:nvPr/>
         </p:nvSpPr>
@@ -14941,7 +16528,7 @@
       </p:sp>
       <p:sp>
         <p:nvSpPr>
-          <p:cNvPr id="205" name="Google Shape;205;p26"/>
+          <p:cNvPr id="218" name="Google Shape;218;p27"/>
           <p:cNvSpPr/>
           <p:nvPr/>
         </p:nvSpPr>
@@ -14987,7 +16574,7 @@
       </p:sp>
       <p:sp>
         <p:nvSpPr>
-          <p:cNvPr id="206" name="Google Shape;206;p26"/>
+          <p:cNvPr id="219" name="Google Shape;219;p27"/>
           <p:cNvSpPr/>
           <p:nvPr/>
         </p:nvSpPr>
@@ -15033,7 +16620,7 @@
       </p:sp>
       <p:sp>
         <p:nvSpPr>
-          <p:cNvPr id="207" name="Google Shape;207;p26"/>
+          <p:cNvPr id="220" name="Google Shape;220;p27"/>
           <p:cNvSpPr/>
           <p:nvPr/>
         </p:nvSpPr>
@@ -15079,7 +16666,7 @@
       </p:sp>
       <p:sp>
         <p:nvSpPr>
-          <p:cNvPr id="208" name="Google Shape;208;p26"/>
+          <p:cNvPr id="221" name="Google Shape;221;p27"/>
           <p:cNvSpPr/>
           <p:nvPr/>
         </p:nvSpPr>
@@ -15129,7 +16716,7 @@
       </p:sp>
       <p:sp>
         <p:nvSpPr>
-          <p:cNvPr id="209" name="Google Shape;209;p26"/>
+          <p:cNvPr id="222" name="Google Shape;222;p27"/>
           <p:cNvSpPr/>
           <p:nvPr/>
         </p:nvSpPr>
@@ -15175,7 +16762,7 @@
       </p:sp>
       <p:sp>
         <p:nvSpPr>
-          <p:cNvPr id="210" name="Google Shape;210;p26"/>
+          <p:cNvPr id="223" name="Google Shape;223;p27"/>
           <p:cNvSpPr/>
           <p:nvPr/>
         </p:nvSpPr>
@@ -15221,7 +16808,7 @@
       </p:sp>
       <p:sp>
         <p:nvSpPr>
-          <p:cNvPr id="211" name="Google Shape;211;p26"/>
+          <p:cNvPr id="224" name="Google Shape;224;p27"/>
           <p:cNvSpPr/>
           <p:nvPr/>
         </p:nvSpPr>
@@ -15267,7 +16854,7 @@
       </p:sp>
       <p:sp>
         <p:nvSpPr>
-          <p:cNvPr id="212" name="Google Shape;212;p26"/>
+          <p:cNvPr id="225" name="Google Shape;225;p27"/>
           <p:cNvSpPr/>
           <p:nvPr/>
         </p:nvSpPr>
@@ -15313,7 +16900,7 @@
       </p:sp>
       <p:sp>
         <p:nvSpPr>
-          <p:cNvPr id="213" name="Google Shape;213;p26"/>
+          <p:cNvPr id="226" name="Google Shape;226;p27"/>
           <p:cNvSpPr/>
           <p:nvPr/>
         </p:nvSpPr>
@@ -15359,7 +16946,7 @@
       </p:sp>
       <p:sp>
         <p:nvSpPr>
-          <p:cNvPr id="214" name="Google Shape;214;p26"/>
+          <p:cNvPr id="227" name="Google Shape;227;p27"/>
           <p:cNvSpPr txBox="1"/>
           <p:nvPr/>
         </p:nvSpPr>
@@ -15520,7 +17107,7 @@
       </p:sp>
       <p:pic>
         <p:nvPicPr>
-          <p:cNvPr id="215" name="Google Shape;215;p26"/>
+          <p:cNvPr id="228" name="Google Shape;228;p27"/>
           <p:cNvPicPr preferRelativeResize="0"/>
           <p:nvPr/>
         </p:nvPicPr>
@@ -15559,7 +17146,7 @@
       </p:pic>
       <p:sp>
         <p:nvSpPr>
-          <p:cNvPr id="216" name="Google Shape;216;p26"/>
+          <p:cNvPr id="229" name="Google Shape;229;p27"/>
           <p:cNvSpPr/>
           <p:nvPr/>
         </p:nvSpPr>
@@ -15605,7 +17192,7 @@
       </p:sp>
       <p:pic>
         <p:nvPicPr>
-          <p:cNvPr id="217" name="Google Shape;217;p26"/>
+          <p:cNvPr id="230" name="Google Shape;230;p27"/>
           <p:cNvPicPr preferRelativeResize="0"/>
           <p:nvPr/>
         </p:nvPicPr>
@@ -15644,7 +17231,7 @@
       </p:pic>
       <p:sp>
         <p:nvSpPr>
-          <p:cNvPr id="218" name="Google Shape;218;p26"/>
+          <p:cNvPr id="231" name="Google Shape;231;p27"/>
           <p:cNvSpPr/>
           <p:nvPr/>
         </p:nvSpPr>
@@ -15690,7 +17277,7 @@
       </p:sp>
       <p:sp>
         <p:nvSpPr>
-          <p:cNvPr id="219" name="Google Shape;219;p26"/>
+          <p:cNvPr id="232" name="Google Shape;232;p27"/>
           <p:cNvSpPr/>
           <p:nvPr/>
         </p:nvSpPr>
@@ -15742,12 +17329,12 @@
 </p:sld>
 </file>
 
-<file path=ppt/slides/slide14.xml><?xml version="1.0" encoding="utf-8"?>
+<file path=ppt/slides/slide15.xml><?xml version="1.0" encoding="utf-8"?>
 <p:sld xmlns:a="http://schemas.openxmlformats.org/drawingml/2006/main" xmlns:r="http://schemas.openxmlformats.org/officeDocument/2006/relationships" xmlns:p="http://schemas.openxmlformats.org/presentationml/2006/main">
   <p:cSld>
     <p:spTree>
       <p:nvGrpSpPr>
-        <p:cNvPr id="1" name="Shape 223"/>
+        <p:cNvPr id="1" name="Shape 236"/>
         <p:cNvGrpSpPr/>
         <p:nvPr/>
       </p:nvGrpSpPr>
@@ -15761,7 +17348,7 @@
       </p:grpSpPr>
       <p:pic>
         <p:nvPicPr>
-          <p:cNvPr id="224" name="Google Shape;224;p27"/>
+          <p:cNvPr id="237" name="Google Shape;237;p28"/>
           <p:cNvPicPr preferRelativeResize="0"/>
           <p:nvPr/>
         </p:nvPicPr>
@@ -15794,7 +17381,7 @@
       </p:pic>
       <p:sp>
         <p:nvSpPr>
-          <p:cNvPr id="225" name="Google Shape;225;p27"/>
+          <p:cNvPr id="238" name="Google Shape;238;p28"/>
           <p:cNvSpPr/>
           <p:nvPr/>
         </p:nvSpPr>
@@ -15838,7 +17425,7 @@
       </p:sp>
       <p:sp>
         <p:nvSpPr>
-          <p:cNvPr id="226" name="Google Shape;226;p27"/>
+          <p:cNvPr id="239" name="Google Shape;239;p28"/>
           <p:cNvSpPr txBox="1"/>
           <p:nvPr/>
         </p:nvSpPr>
@@ -15928,7 +17515,7 @@
       </p:sp>
       <p:sp>
         <p:nvSpPr>
-          <p:cNvPr id="227" name="Google Shape;227;p27"/>
+          <p:cNvPr id="240" name="Google Shape;240;p28"/>
           <p:cNvSpPr txBox="1"/>
           <p:nvPr/>
         </p:nvSpPr>
@@ -16019,13 +17606,13 @@
       </p:sp>
       <p:sp>
         <p:nvSpPr>
-          <p:cNvPr id="228" name="Google Shape;228;p27"/>
+          <p:cNvPr id="241" name="Google Shape;241;p28"/>
           <p:cNvSpPr txBox="1"/>
           <p:nvPr/>
         </p:nvSpPr>
         <p:spPr>
           <a:xfrm>
-            <a:off x="1541111" y="3215325"/>
+            <a:off x="93311" y="3215325"/>
             <a:ext cx="5331600" cy="1847100"/>
           </a:xfrm>
           <a:prstGeom prst="rect">
@@ -16375,7 +17962,7 @@
       </p:sp>
       <p:sp>
         <p:nvSpPr>
-          <p:cNvPr id="229" name="Google Shape;229;p27"/>
+          <p:cNvPr id="242" name="Google Shape;242;p28"/>
           <p:cNvSpPr/>
           <p:nvPr/>
         </p:nvSpPr>
@@ -16417,6 +18004,105 @@
           </a:p>
         </p:txBody>
       </p:sp>
+      <p:sp>
+        <p:nvSpPr>
+          <p:cNvPr id="243" name="Google Shape;243;p28"/>
+          <p:cNvSpPr txBox="1"/>
+          <p:nvPr/>
+        </p:nvSpPr>
+        <p:spPr>
+          <a:xfrm>
+            <a:off x="5684100" y="3807975"/>
+            <a:ext cx="3382800" cy="661800"/>
+          </a:xfrm>
+          <a:prstGeom prst="rect">
+            <a:avLst/>
+          </a:prstGeom>
+          <a:solidFill>
+            <a:srgbClr val="FFF2CC"/>
+          </a:solidFill>
+          <a:ln w="9525" cap="flat" cmpd="sng">
+            <a:solidFill>
+              <a:srgbClr val="FF0000"/>
+            </a:solidFill>
+            <a:prstDash val="solid"/>
+            <a:round/>
+            <a:headEnd type="none" w="sm" len="sm"/>
+            <a:tailEnd type="none" w="sm" len="sm"/>
+          </a:ln>
+        </p:spPr>
+        <p:txBody>
+          <a:bodyPr spcFirstLastPara="1" wrap="square" lIns="91425" tIns="91425" rIns="91425" bIns="91425" anchor="t" anchorCtr="0">
+            <a:spAutoFit/>
+          </a:bodyPr>
+          <a:lstStyle/>
+          <a:p>
+            <a:pPr marL="0" lvl="0" indent="0" algn="l" rtl="0">
+              <a:spcBef>
+                <a:spcPts val="0"/>
+              </a:spcBef>
+              <a:spcAft>
+                <a:spcPts val="0"/>
+              </a:spcAft>
+              <a:buNone/>
+            </a:pPr>
+            <a:r>
+              <a:rPr lang="en" sz="1300">
+                <a:latin typeface="Calibri"/>
+                <a:ea typeface="Calibri"/>
+                <a:cs typeface="Calibri"/>
+                <a:sym typeface="Calibri"/>
+              </a:rPr>
+              <a:t>Be an early applicant:</a:t>
+            </a:r>
+            <a:endParaRPr sz="1300">
+              <a:latin typeface="Calibri"/>
+              <a:ea typeface="Calibri"/>
+              <a:cs typeface="Calibri"/>
+              <a:sym typeface="Calibri"/>
+            </a:endParaRPr>
+          </a:p>
+          <a:p>
+            <a:pPr marL="0" lvl="0" indent="0" algn="l" rtl="0">
+              <a:spcBef>
+                <a:spcPts val="0"/>
+              </a:spcBef>
+              <a:spcAft>
+                <a:spcPts val="0"/>
+              </a:spcAft>
+              <a:buNone/>
+            </a:pPr>
+            <a:r>
+              <a:rPr lang="en" sz="900" u="sng">
+                <a:solidFill>
+                  <a:schemeClr val="hlink"/>
+                </a:solidFill>
+                <a:latin typeface="Calibri"/>
+                <a:ea typeface="Calibri"/>
+                <a:cs typeface="Calibri"/>
+                <a:sym typeface="Calibri"/>
+                <a:hlinkClick r:id="rId6"/>
+              </a:rPr>
+              <a:t>https://medium.com/career-programming/i-paid-3-000-for-career-coaching-this-1-tip-paid-me-a-1000-roi-4d21e1bd6862</a:t>
+            </a:r>
+            <a:r>
+              <a:rPr lang="en" sz="900">
+                <a:latin typeface="Calibri"/>
+                <a:ea typeface="Calibri"/>
+                <a:cs typeface="Calibri"/>
+                <a:sym typeface="Calibri"/>
+              </a:rPr>
+              <a:t> </a:t>
+            </a:r>
+            <a:endParaRPr sz="900">
+              <a:latin typeface="Calibri"/>
+              <a:ea typeface="Calibri"/>
+              <a:cs typeface="Calibri"/>
+              <a:sym typeface="Calibri"/>
+            </a:endParaRPr>
+          </a:p>
+        </p:txBody>
+      </p:sp>
     </p:spTree>
   </p:cSld>
   <p:clrMapOvr>
@@ -16425,12 +18111,12 @@
 </p:sld>
 </file>
 
-<file path=ppt/slides/slide15.xml><?xml version="1.0" encoding="utf-8"?>
+<file path=ppt/slides/slide16.xml><?xml version="1.0" encoding="utf-8"?>
 <p:sld xmlns:a="http://schemas.openxmlformats.org/drawingml/2006/main" xmlns:r="http://schemas.openxmlformats.org/officeDocument/2006/relationships" xmlns:p="http://schemas.openxmlformats.org/presentationml/2006/main">
   <p:cSld>
     <p:spTree>
       <p:nvGrpSpPr>
-        <p:cNvPr id="1" name="Shape 233"/>
+        <p:cNvPr id="1" name="Shape 247"/>
         <p:cNvGrpSpPr/>
         <p:nvPr/>
       </p:nvGrpSpPr>
@@ -16444,7 +18130,7 @@
       </p:grpSpPr>
       <p:pic>
         <p:nvPicPr>
-          <p:cNvPr id="234" name="Google Shape;234;p28"/>
+          <p:cNvPr id="248" name="Google Shape;248;p29"/>
           <p:cNvPicPr preferRelativeResize="0"/>
           <p:nvPr/>
         </p:nvPicPr>
@@ -16471,7 +18157,7 @@
       </p:pic>
       <p:sp>
         <p:nvSpPr>
-          <p:cNvPr id="235" name="Google Shape;235;p28"/>
+          <p:cNvPr id="249" name="Google Shape;249;p29"/>
           <p:cNvSpPr txBox="1"/>
           <p:nvPr/>
         </p:nvSpPr>
@@ -16537,7 +18223,7 @@
       </p:sp>
       <p:sp>
         <p:nvSpPr>
-          <p:cNvPr id="236" name="Google Shape;236;p28"/>
+          <p:cNvPr id="250" name="Google Shape;250;p29"/>
           <p:cNvSpPr txBox="1"/>
           <p:nvPr/>
         </p:nvSpPr>
@@ -16967,7 +18653,7 @@
       </p:sp>
       <p:pic>
         <p:nvPicPr>
-          <p:cNvPr id="237" name="Google Shape;237;p28"/>
+          <p:cNvPr id="251" name="Google Shape;251;p29"/>
           <p:cNvPicPr preferRelativeResize="0"/>
           <p:nvPr/>
         </p:nvPicPr>
@@ -16999,7 +18685,7 @@
       </p:pic>
       <p:sp>
         <p:nvSpPr>
-          <p:cNvPr id="238" name="Google Shape;238;p28"/>
+          <p:cNvPr id="252" name="Google Shape;252;p29"/>
           <p:cNvSpPr txBox="1"/>
           <p:nvPr/>
         </p:nvSpPr>
@@ -17078,7 +18764,7 @@
       </p:sp>
       <p:sp>
         <p:nvSpPr>
-          <p:cNvPr id="239" name="Google Shape;239;p28"/>
+          <p:cNvPr id="253" name="Google Shape;253;p29"/>
           <p:cNvSpPr txBox="1"/>
           <p:nvPr/>
         </p:nvSpPr>
@@ -17150,12 +18836,12 @@
 </p:sld>
 </file>
 
-<file path=ppt/slides/slide16.xml><?xml version="1.0" encoding="utf-8"?>
+<file path=ppt/slides/slide17.xml><?xml version="1.0" encoding="utf-8"?>
 <p:sld xmlns:a="http://schemas.openxmlformats.org/drawingml/2006/main" xmlns:r="http://schemas.openxmlformats.org/officeDocument/2006/relationships" xmlns:p="http://schemas.openxmlformats.org/presentationml/2006/main">
   <p:cSld>
     <p:spTree>
       <p:nvGrpSpPr>
-        <p:cNvPr id="1" name="Shape 243"/>
+        <p:cNvPr id="1" name="Shape 257"/>
         <p:cNvGrpSpPr/>
         <p:nvPr/>
       </p:nvGrpSpPr>
@@ -17169,7 +18855,7 @@
       </p:grpSpPr>
       <p:sp>
         <p:nvSpPr>
-          <p:cNvPr id="244" name="Google Shape;244;p29"/>
+          <p:cNvPr id="258" name="Google Shape;258;p30"/>
           <p:cNvSpPr txBox="1"/>
           <p:nvPr/>
         </p:nvSpPr>
@@ -22551,7 +24237,31 @@
                 <a:cs typeface="Calibri"/>
                 <a:sym typeface="Calibri"/>
               </a:rPr>
-              <a:t>Nvidia is developing a new B20 AI chip for China which is tailored to comply with U.S. export controls for the Chinese market. </a:t>
+              <a:t>Nvidia is developing a new </a:t>
+            </a:r>
+            <a:r>
+              <a:rPr lang="en" sz="1300" b="1">
+                <a:solidFill>
+                  <a:srgbClr val="FF0000"/>
+                </a:solidFill>
+                <a:latin typeface="Calibri"/>
+                <a:ea typeface="Calibri"/>
+                <a:cs typeface="Calibri"/>
+                <a:sym typeface="Calibri"/>
+              </a:rPr>
+              <a:t>B20</a:t>
+            </a:r>
+            <a:r>
+              <a:rPr lang="en" sz="1300">
+                <a:solidFill>
+                  <a:schemeClr val="dk1"/>
+                </a:solidFill>
+                <a:latin typeface="Calibri"/>
+                <a:ea typeface="Calibri"/>
+                <a:cs typeface="Calibri"/>
+                <a:sym typeface="Calibri"/>
+              </a:rPr>
+              <a:t> AI chip for China which is tailored to comply with U.S. export controls for the Chinese market. </a:t>
             </a:r>
             <a:endParaRPr sz="1000">
               <a:solidFill>
@@ -23809,6 +25519,960 @@
         <p:spPr>
           <a:xfrm>
             <a:off x="76200" y="0"/>
+            <a:ext cx="3345000" cy="326400"/>
+          </a:xfrm>
+          <a:prstGeom prst="rect">
+            <a:avLst/>
+          </a:prstGeom>
+          <a:noFill/>
+          <a:ln>
+            <a:noFill/>
+          </a:ln>
+        </p:spPr>
+        <p:txBody>
+          <a:bodyPr spcFirstLastPara="1" wrap="square" lIns="9125" tIns="9125" rIns="9125" bIns="9125" anchor="t" anchorCtr="0">
+            <a:spAutoFit/>
+          </a:bodyPr>
+          <a:lstStyle/>
+          <a:p>
+            <a:pPr marL="0" lvl="0" indent="0" algn="l" rtl="0">
+              <a:spcBef>
+                <a:spcPts val="0"/>
+              </a:spcBef>
+              <a:spcAft>
+                <a:spcPts val="0"/>
+              </a:spcAft>
+              <a:buClr>
+                <a:schemeClr val="dk1"/>
+              </a:buClr>
+              <a:buSzPts val="1100"/>
+              <a:buFont typeface="Arial"/>
+              <a:buNone/>
+            </a:pPr>
+            <a:r>
+              <a:rPr lang="en" sz="2000" b="1">
+                <a:solidFill>
+                  <a:schemeClr val="dk1"/>
+                </a:solidFill>
+                <a:latin typeface="Calibri"/>
+                <a:ea typeface="Calibri"/>
+                <a:cs typeface="Calibri"/>
+                <a:sym typeface="Calibri"/>
+              </a:rPr>
+              <a:t>Ollama Tool Calling</a:t>
+            </a:r>
+            <a:endParaRPr sz="2000" b="1">
+              <a:solidFill>
+                <a:schemeClr val="dk1"/>
+              </a:solidFill>
+              <a:latin typeface="Calibri"/>
+              <a:ea typeface="Calibri"/>
+              <a:cs typeface="Calibri"/>
+              <a:sym typeface="Calibri"/>
+            </a:endParaRPr>
+          </a:p>
+        </p:txBody>
+      </p:sp>
+      <p:sp>
+        <p:nvSpPr>
+          <p:cNvPr id="135" name="Google Shape;135;p21"/>
+          <p:cNvSpPr txBox="1"/>
+          <p:nvPr/>
+        </p:nvSpPr>
+        <p:spPr>
+          <a:xfrm>
+            <a:off x="119800" y="801350"/>
+            <a:ext cx="4401600" cy="3220200"/>
+          </a:xfrm>
+          <a:prstGeom prst="rect">
+            <a:avLst/>
+          </a:prstGeom>
+          <a:solidFill>
+            <a:srgbClr val="FFF2CC"/>
+          </a:solidFill>
+          <a:ln w="9525" cap="flat" cmpd="sng">
+            <a:solidFill>
+              <a:srgbClr val="FF0000"/>
+            </a:solidFill>
+            <a:prstDash val="solid"/>
+            <a:round/>
+            <a:headEnd type="none" w="sm" len="sm"/>
+            <a:tailEnd type="none" w="sm" len="sm"/>
+          </a:ln>
+        </p:spPr>
+        <p:txBody>
+          <a:bodyPr spcFirstLastPara="1" wrap="square" lIns="9125" tIns="9125" rIns="9125" bIns="9125" anchor="t" anchorCtr="0">
+            <a:spAutoFit/>
+          </a:bodyPr>
+          <a:lstStyle/>
+          <a:p>
+            <a:pPr marL="0" lvl="0" indent="0" algn="l" rtl="0">
+              <a:spcBef>
+                <a:spcPts val="0"/>
+              </a:spcBef>
+              <a:spcAft>
+                <a:spcPts val="0"/>
+              </a:spcAft>
+              <a:buNone/>
+            </a:pPr>
+            <a:r>
+              <a:rPr lang="en" sz="1300" b="1">
+                <a:solidFill>
+                  <a:srgbClr val="FF0000"/>
+                </a:solidFill>
+                <a:latin typeface="Calibri"/>
+                <a:ea typeface="Calibri"/>
+                <a:cs typeface="Calibri"/>
+                <a:sym typeface="Calibri"/>
+              </a:rPr>
+              <a:t>Ollama now supports tool calling</a:t>
+            </a:r>
+            <a:r>
+              <a:rPr lang="en" sz="1300">
+                <a:solidFill>
+                  <a:schemeClr val="dk1"/>
+                </a:solidFill>
+                <a:latin typeface="Calibri"/>
+                <a:ea typeface="Calibri"/>
+                <a:cs typeface="Calibri"/>
+                <a:sym typeface="Calibri"/>
+              </a:rPr>
+              <a:t> with popular models such as Meta's Llama 3.1, Mistral Nemo, Firefunction v2,  Command-R+, and many others). Typical usage:</a:t>
+            </a:r>
+            <a:endParaRPr sz="1300">
+              <a:solidFill>
+                <a:schemeClr val="dk1"/>
+              </a:solidFill>
+              <a:latin typeface="Calibri"/>
+              <a:ea typeface="Calibri"/>
+              <a:cs typeface="Calibri"/>
+              <a:sym typeface="Calibri"/>
+            </a:endParaRPr>
+          </a:p>
+          <a:p>
+            <a:pPr marL="457200" lvl="0" indent="-311150" algn="l" rtl="0">
+              <a:spcBef>
+                <a:spcPts val="0"/>
+              </a:spcBef>
+              <a:spcAft>
+                <a:spcPts val="0"/>
+              </a:spcAft>
+              <a:buClr>
+                <a:schemeClr val="dk1"/>
+              </a:buClr>
+              <a:buSzPts val="1300"/>
+              <a:buFont typeface="Calibri"/>
+              <a:buChar char="●"/>
+            </a:pPr>
+            <a:r>
+              <a:rPr lang="en" sz="1300">
+                <a:solidFill>
+                  <a:schemeClr val="dk1"/>
+                </a:solidFill>
+                <a:latin typeface="Calibri"/>
+                <a:ea typeface="Calibri"/>
+                <a:cs typeface="Calibri"/>
+                <a:sym typeface="Calibri"/>
+              </a:rPr>
+              <a:t>Functions and APIs </a:t>
+            </a:r>
+            <a:endParaRPr sz="1300">
+              <a:solidFill>
+                <a:schemeClr val="dk1"/>
+              </a:solidFill>
+              <a:latin typeface="Calibri"/>
+              <a:ea typeface="Calibri"/>
+              <a:cs typeface="Calibri"/>
+              <a:sym typeface="Calibri"/>
+            </a:endParaRPr>
+          </a:p>
+          <a:p>
+            <a:pPr marL="457200" lvl="0" indent="-311150" algn="l" rtl="0">
+              <a:spcBef>
+                <a:spcPts val="0"/>
+              </a:spcBef>
+              <a:spcAft>
+                <a:spcPts val="0"/>
+              </a:spcAft>
+              <a:buClr>
+                <a:schemeClr val="dk1"/>
+              </a:buClr>
+              <a:buSzPts val="1300"/>
+              <a:buFont typeface="Calibri"/>
+              <a:buChar char="●"/>
+            </a:pPr>
+            <a:r>
+              <a:rPr lang="en" sz="1300">
+                <a:solidFill>
+                  <a:schemeClr val="dk1"/>
+                </a:solidFill>
+                <a:latin typeface="Calibri"/>
+                <a:ea typeface="Calibri"/>
+                <a:cs typeface="Calibri"/>
+                <a:sym typeface="Calibri"/>
+              </a:rPr>
+              <a:t>Web browsing </a:t>
+            </a:r>
+            <a:endParaRPr sz="1300">
+              <a:solidFill>
+                <a:schemeClr val="dk1"/>
+              </a:solidFill>
+              <a:latin typeface="Calibri"/>
+              <a:ea typeface="Calibri"/>
+              <a:cs typeface="Calibri"/>
+              <a:sym typeface="Calibri"/>
+            </a:endParaRPr>
+          </a:p>
+          <a:p>
+            <a:pPr marL="457200" lvl="0" indent="-311150" algn="l" rtl="0">
+              <a:spcBef>
+                <a:spcPts val="0"/>
+              </a:spcBef>
+              <a:spcAft>
+                <a:spcPts val="0"/>
+              </a:spcAft>
+              <a:buClr>
+                <a:schemeClr val="dk1"/>
+              </a:buClr>
+              <a:buSzPts val="1300"/>
+              <a:buFont typeface="Calibri"/>
+              <a:buChar char="●"/>
+            </a:pPr>
+            <a:r>
+              <a:rPr lang="en" sz="1300">
+                <a:solidFill>
+                  <a:schemeClr val="dk1"/>
+                </a:solidFill>
+                <a:latin typeface="Calibri"/>
+                <a:ea typeface="Calibri"/>
+                <a:cs typeface="Calibri"/>
+                <a:sym typeface="Calibri"/>
+              </a:rPr>
+              <a:t>Code interpreter </a:t>
+            </a:r>
+            <a:endParaRPr sz="1300">
+              <a:solidFill>
+                <a:schemeClr val="dk1"/>
+              </a:solidFill>
+              <a:latin typeface="Calibri"/>
+              <a:ea typeface="Calibri"/>
+              <a:cs typeface="Calibri"/>
+              <a:sym typeface="Calibri"/>
+            </a:endParaRPr>
+          </a:p>
+          <a:p>
+            <a:pPr marL="457200" lvl="0" indent="-311150" algn="l" rtl="0">
+              <a:spcBef>
+                <a:spcPts val="0"/>
+              </a:spcBef>
+              <a:spcAft>
+                <a:spcPts val="0"/>
+              </a:spcAft>
+              <a:buClr>
+                <a:schemeClr val="dk1"/>
+              </a:buClr>
+              <a:buSzPts val="1300"/>
+              <a:buFont typeface="Calibri"/>
+              <a:buChar char="●"/>
+            </a:pPr>
+            <a:r>
+              <a:rPr lang="en" sz="1300">
+                <a:solidFill>
+                  <a:schemeClr val="dk1"/>
+                </a:solidFill>
+                <a:latin typeface="Calibri"/>
+                <a:ea typeface="Calibri"/>
+                <a:cs typeface="Calibri"/>
+                <a:sym typeface="Calibri"/>
+              </a:rPr>
+              <a:t>and more! </a:t>
+            </a:r>
+            <a:endParaRPr sz="1300">
+              <a:solidFill>
+                <a:schemeClr val="dk1"/>
+              </a:solidFill>
+              <a:latin typeface="Calibri"/>
+              <a:ea typeface="Calibri"/>
+              <a:cs typeface="Calibri"/>
+              <a:sym typeface="Calibri"/>
+            </a:endParaRPr>
+          </a:p>
+          <a:p>
+            <a:pPr marL="0" lvl="0" indent="0" algn="l" rtl="0">
+              <a:spcBef>
+                <a:spcPts val="0"/>
+              </a:spcBef>
+              <a:spcAft>
+                <a:spcPts val="0"/>
+              </a:spcAft>
+              <a:buNone/>
+            </a:pPr>
+            <a:endParaRPr sz="1300">
+              <a:solidFill>
+                <a:schemeClr val="dk1"/>
+              </a:solidFill>
+              <a:latin typeface="Calibri"/>
+              <a:ea typeface="Calibri"/>
+              <a:cs typeface="Calibri"/>
+              <a:sym typeface="Calibri"/>
+            </a:endParaRPr>
+          </a:p>
+          <a:p>
+            <a:pPr marL="0" lvl="0" indent="0" algn="l" rtl="0">
+              <a:spcBef>
+                <a:spcPts val="0"/>
+              </a:spcBef>
+              <a:spcAft>
+                <a:spcPts val="0"/>
+              </a:spcAft>
+              <a:buClr>
+                <a:schemeClr val="dk1"/>
+              </a:buClr>
+              <a:buSzPts val="1100"/>
+              <a:buFont typeface="Arial"/>
+              <a:buNone/>
+            </a:pPr>
+            <a:r>
+              <a:rPr lang="en" sz="1300">
+                <a:solidFill>
+                  <a:schemeClr val="dk1"/>
+                </a:solidFill>
+                <a:latin typeface="Calibri"/>
+                <a:ea typeface="Calibri"/>
+                <a:cs typeface="Calibri"/>
+                <a:sym typeface="Calibri"/>
+              </a:rPr>
+              <a:t>To have models call tools, you can provide a list of available tools via the </a:t>
+            </a:r>
+            <a:r>
+              <a:rPr lang="en" sz="1300" b="1">
+                <a:solidFill>
+                  <a:srgbClr val="FF0000"/>
+                </a:solidFill>
+                <a:latin typeface="Calibri"/>
+                <a:ea typeface="Calibri"/>
+                <a:cs typeface="Calibri"/>
+                <a:sym typeface="Calibri"/>
+              </a:rPr>
+              <a:t>tools field</a:t>
+            </a:r>
+            <a:r>
+              <a:rPr lang="en" sz="1300">
+                <a:solidFill>
+                  <a:schemeClr val="dk1"/>
+                </a:solidFill>
+                <a:latin typeface="Calibri"/>
+                <a:ea typeface="Calibri"/>
+                <a:cs typeface="Calibri"/>
+                <a:sym typeface="Calibri"/>
+              </a:rPr>
+              <a:t> in Ollama’s API. The supported models will now answer with a </a:t>
+            </a:r>
+            <a:r>
+              <a:rPr lang="en" sz="1300" b="1">
+                <a:solidFill>
+                  <a:srgbClr val="FF0000"/>
+                </a:solidFill>
+                <a:latin typeface="Calibri"/>
+                <a:ea typeface="Calibri"/>
+                <a:cs typeface="Calibri"/>
+                <a:sym typeface="Calibri"/>
+              </a:rPr>
+              <a:t>tool_calls response in the API</a:t>
+            </a:r>
+            <a:r>
+              <a:rPr lang="en" sz="1300">
+                <a:solidFill>
+                  <a:schemeClr val="dk1"/>
+                </a:solidFill>
+                <a:latin typeface="Calibri"/>
+                <a:ea typeface="Calibri"/>
+                <a:cs typeface="Calibri"/>
+                <a:sym typeface="Calibri"/>
+              </a:rPr>
+              <a:t>.</a:t>
+            </a:r>
+            <a:endParaRPr sz="1300">
+              <a:solidFill>
+                <a:schemeClr val="dk1"/>
+              </a:solidFill>
+              <a:latin typeface="Calibri"/>
+              <a:ea typeface="Calibri"/>
+              <a:cs typeface="Calibri"/>
+              <a:sym typeface="Calibri"/>
+            </a:endParaRPr>
+          </a:p>
+          <a:p>
+            <a:pPr marL="0" lvl="0" indent="0" algn="l" rtl="0">
+              <a:spcBef>
+                <a:spcPts val="0"/>
+              </a:spcBef>
+              <a:spcAft>
+                <a:spcPts val="0"/>
+              </a:spcAft>
+              <a:buClr>
+                <a:schemeClr val="dk1"/>
+              </a:buClr>
+              <a:buSzPts val="1100"/>
+              <a:buFont typeface="Arial"/>
+              <a:buNone/>
+            </a:pPr>
+            <a:r>
+              <a:rPr lang="en" sz="1300">
+                <a:solidFill>
+                  <a:schemeClr val="dk1"/>
+                </a:solidFill>
+                <a:latin typeface="Calibri"/>
+                <a:ea typeface="Calibri"/>
+                <a:cs typeface="Calibri"/>
+                <a:sym typeface="Calibri"/>
+              </a:rPr>
+              <a:t> </a:t>
+            </a:r>
+            <a:endParaRPr sz="1300">
+              <a:solidFill>
+                <a:schemeClr val="dk1"/>
+              </a:solidFill>
+              <a:latin typeface="Calibri"/>
+              <a:ea typeface="Calibri"/>
+              <a:cs typeface="Calibri"/>
+              <a:sym typeface="Calibri"/>
+            </a:endParaRPr>
+          </a:p>
+          <a:p>
+            <a:pPr marL="0" lvl="0" indent="0" algn="l" rtl="0">
+              <a:spcBef>
+                <a:spcPts val="0"/>
+              </a:spcBef>
+              <a:spcAft>
+                <a:spcPts val="0"/>
+              </a:spcAft>
+              <a:buClr>
+                <a:schemeClr val="dk1"/>
+              </a:buClr>
+              <a:buSzPts val="1100"/>
+              <a:buFont typeface="Arial"/>
+              <a:buNone/>
+            </a:pPr>
+            <a:r>
+              <a:rPr lang="en" sz="1300">
+                <a:solidFill>
+                  <a:schemeClr val="dk1"/>
+                </a:solidFill>
+                <a:latin typeface="Calibri"/>
+                <a:ea typeface="Calibri"/>
+                <a:cs typeface="Calibri"/>
+                <a:sym typeface="Calibri"/>
+              </a:rPr>
+              <a:t>Tool responses can be provided via messages with the </a:t>
+            </a:r>
+            <a:r>
+              <a:rPr lang="en" sz="1300" b="1">
+                <a:solidFill>
+                  <a:srgbClr val="FF0000"/>
+                </a:solidFill>
+                <a:latin typeface="Calibri"/>
+                <a:ea typeface="Calibri"/>
+                <a:cs typeface="Calibri"/>
+                <a:sym typeface="Calibri"/>
+              </a:rPr>
+              <a:t>tool role</a:t>
+            </a:r>
+            <a:r>
+              <a:rPr lang="en" sz="1300">
+                <a:solidFill>
+                  <a:schemeClr val="dk1"/>
+                </a:solidFill>
+                <a:latin typeface="Calibri"/>
+                <a:ea typeface="Calibri"/>
+                <a:cs typeface="Calibri"/>
+                <a:sym typeface="Calibri"/>
+              </a:rPr>
+              <a:t>. </a:t>
+            </a:r>
+            <a:endParaRPr sz="1300">
+              <a:solidFill>
+                <a:schemeClr val="dk1"/>
+              </a:solidFill>
+              <a:latin typeface="Calibri"/>
+              <a:ea typeface="Calibri"/>
+              <a:cs typeface="Calibri"/>
+              <a:sym typeface="Calibri"/>
+            </a:endParaRPr>
+          </a:p>
+          <a:p>
+            <a:pPr marL="0" lvl="0" indent="0" algn="l" rtl="0">
+              <a:spcBef>
+                <a:spcPts val="0"/>
+              </a:spcBef>
+              <a:spcAft>
+                <a:spcPts val="0"/>
+              </a:spcAft>
+              <a:buNone/>
+            </a:pPr>
+            <a:endParaRPr sz="1300">
+              <a:solidFill>
+                <a:schemeClr val="dk1"/>
+              </a:solidFill>
+              <a:latin typeface="Calibri"/>
+              <a:ea typeface="Calibri"/>
+              <a:cs typeface="Calibri"/>
+              <a:sym typeface="Calibri"/>
+            </a:endParaRPr>
+          </a:p>
+          <a:p>
+            <a:pPr marL="0" lvl="0" indent="0" algn="l" rtl="0">
+              <a:spcBef>
+                <a:spcPts val="0"/>
+              </a:spcBef>
+              <a:spcAft>
+                <a:spcPts val="0"/>
+              </a:spcAft>
+              <a:buNone/>
+            </a:pPr>
+            <a:r>
+              <a:rPr lang="en" sz="1300" b="1">
+                <a:solidFill>
+                  <a:srgbClr val="FF0000"/>
+                </a:solidFill>
+                <a:latin typeface="Calibri"/>
+                <a:ea typeface="Calibri"/>
+                <a:cs typeface="Calibri"/>
+                <a:sym typeface="Calibri"/>
+              </a:rPr>
+              <a:t>Ollama’s OpenAI compatible endpoint</a:t>
+            </a:r>
+            <a:r>
+              <a:rPr lang="en" sz="1300">
+                <a:solidFill>
+                  <a:schemeClr val="dk1"/>
+                </a:solidFill>
+                <a:latin typeface="Calibri"/>
+                <a:ea typeface="Calibri"/>
+                <a:cs typeface="Calibri"/>
+                <a:sym typeface="Calibri"/>
+              </a:rPr>
+              <a:t> also now supports tools, making it possible to switch to using Llama 3.1 and other models.</a:t>
+            </a:r>
+            <a:endParaRPr sz="1300">
+              <a:solidFill>
+                <a:schemeClr val="dk1"/>
+              </a:solidFill>
+              <a:latin typeface="Calibri"/>
+              <a:ea typeface="Calibri"/>
+              <a:cs typeface="Calibri"/>
+              <a:sym typeface="Calibri"/>
+            </a:endParaRPr>
+          </a:p>
+        </p:txBody>
+      </p:sp>
+      <p:sp>
+        <p:nvSpPr>
+          <p:cNvPr id="136" name="Google Shape;136;p21"/>
+          <p:cNvSpPr txBox="1"/>
+          <p:nvPr/>
+        </p:nvSpPr>
+        <p:spPr>
+          <a:xfrm>
+            <a:off x="4680925" y="1210875"/>
+            <a:ext cx="4401600" cy="1218900"/>
+          </a:xfrm>
+          <a:prstGeom prst="rect">
+            <a:avLst/>
+          </a:prstGeom>
+          <a:solidFill>
+            <a:srgbClr val="FFF2CC"/>
+          </a:solidFill>
+          <a:ln w="9525" cap="flat" cmpd="sng">
+            <a:solidFill>
+              <a:srgbClr val="FF0000"/>
+            </a:solidFill>
+            <a:prstDash val="solid"/>
+            <a:round/>
+            <a:headEnd type="none" w="sm" len="sm"/>
+            <a:tailEnd type="none" w="sm" len="sm"/>
+          </a:ln>
+        </p:spPr>
+        <p:txBody>
+          <a:bodyPr spcFirstLastPara="1" wrap="square" lIns="9125" tIns="9125" rIns="9125" bIns="9125" anchor="t" anchorCtr="0">
+            <a:spAutoFit/>
+          </a:bodyPr>
+          <a:lstStyle/>
+          <a:p>
+            <a:pPr marL="0" lvl="0" indent="0" algn="l" rtl="0">
+              <a:spcBef>
+                <a:spcPts val="0"/>
+              </a:spcBef>
+              <a:spcAft>
+                <a:spcPts val="0"/>
+              </a:spcAft>
+              <a:buNone/>
+            </a:pPr>
+            <a:r>
+              <a:rPr lang="en" sz="1300">
+                <a:solidFill>
+                  <a:schemeClr val="dk1"/>
+                </a:solidFill>
+                <a:latin typeface="Calibri"/>
+                <a:ea typeface="Calibri"/>
+                <a:cs typeface="Calibri"/>
+                <a:sym typeface="Calibri"/>
+              </a:rPr>
+              <a:t>Python Example:</a:t>
+            </a:r>
+            <a:endParaRPr sz="1300">
+              <a:solidFill>
+                <a:schemeClr val="dk1"/>
+              </a:solidFill>
+              <a:latin typeface="Calibri"/>
+              <a:ea typeface="Calibri"/>
+              <a:cs typeface="Calibri"/>
+              <a:sym typeface="Calibri"/>
+            </a:endParaRPr>
+          </a:p>
+          <a:p>
+            <a:pPr marL="0" lvl="0" indent="0" algn="l" rtl="0">
+              <a:spcBef>
+                <a:spcPts val="0"/>
+              </a:spcBef>
+              <a:spcAft>
+                <a:spcPts val="0"/>
+              </a:spcAft>
+              <a:buNone/>
+            </a:pPr>
+            <a:r>
+              <a:rPr lang="en" sz="1300" u="sng">
+                <a:solidFill>
+                  <a:schemeClr val="hlink"/>
+                </a:solidFill>
+                <a:latin typeface="Calibri"/>
+                <a:ea typeface="Calibri"/>
+                <a:cs typeface="Calibri"/>
+                <a:sym typeface="Calibri"/>
+                <a:hlinkClick r:id="rId3"/>
+              </a:rPr>
+              <a:t>https://github.com/ollama/ollama-python/blob/main/examples/tools/main.py</a:t>
+            </a:r>
+            <a:endParaRPr sz="1300">
+              <a:solidFill>
+                <a:schemeClr val="dk1"/>
+              </a:solidFill>
+              <a:latin typeface="Calibri"/>
+              <a:ea typeface="Calibri"/>
+              <a:cs typeface="Calibri"/>
+              <a:sym typeface="Calibri"/>
+            </a:endParaRPr>
+          </a:p>
+          <a:p>
+            <a:pPr marL="0" lvl="0" indent="0" algn="l" rtl="0">
+              <a:spcBef>
+                <a:spcPts val="0"/>
+              </a:spcBef>
+              <a:spcAft>
+                <a:spcPts val="0"/>
+              </a:spcAft>
+              <a:buNone/>
+            </a:pPr>
+            <a:endParaRPr sz="1300">
+              <a:solidFill>
+                <a:schemeClr val="dk1"/>
+              </a:solidFill>
+              <a:latin typeface="Calibri"/>
+              <a:ea typeface="Calibri"/>
+              <a:cs typeface="Calibri"/>
+              <a:sym typeface="Calibri"/>
+            </a:endParaRPr>
+          </a:p>
+          <a:p>
+            <a:pPr marL="0" lvl="0" indent="0" algn="l" rtl="0">
+              <a:spcBef>
+                <a:spcPts val="0"/>
+              </a:spcBef>
+              <a:spcAft>
+                <a:spcPts val="0"/>
+              </a:spcAft>
+              <a:buNone/>
+            </a:pPr>
+            <a:r>
+              <a:rPr lang="en" sz="1300">
+                <a:solidFill>
+                  <a:schemeClr val="dk1"/>
+                </a:solidFill>
+                <a:latin typeface="Calibri"/>
+                <a:ea typeface="Calibri"/>
+                <a:cs typeface="Calibri"/>
+                <a:sym typeface="Calibri"/>
+              </a:rPr>
+              <a:t>Ollama Python Library:</a:t>
+            </a:r>
+            <a:endParaRPr sz="1300">
+              <a:solidFill>
+                <a:schemeClr val="dk1"/>
+              </a:solidFill>
+              <a:latin typeface="Calibri"/>
+              <a:ea typeface="Calibri"/>
+              <a:cs typeface="Calibri"/>
+              <a:sym typeface="Calibri"/>
+            </a:endParaRPr>
+          </a:p>
+          <a:p>
+            <a:pPr marL="0" lvl="0" indent="0" algn="l" rtl="0">
+              <a:spcBef>
+                <a:spcPts val="0"/>
+              </a:spcBef>
+              <a:spcAft>
+                <a:spcPts val="0"/>
+              </a:spcAft>
+              <a:buNone/>
+            </a:pPr>
+            <a:r>
+              <a:rPr lang="en" sz="1300" u="sng">
+                <a:solidFill>
+                  <a:schemeClr val="hlink"/>
+                </a:solidFill>
+                <a:latin typeface="Calibri"/>
+                <a:ea typeface="Calibri"/>
+                <a:cs typeface="Calibri"/>
+                <a:sym typeface="Calibri"/>
+                <a:hlinkClick r:id="rId4"/>
+              </a:rPr>
+              <a:t>https://github.com/ollama/ollama-python</a:t>
+            </a:r>
+            <a:r>
+              <a:rPr lang="en" sz="1300">
+                <a:solidFill>
+                  <a:schemeClr val="dk1"/>
+                </a:solidFill>
+                <a:latin typeface="Calibri"/>
+                <a:ea typeface="Calibri"/>
+                <a:cs typeface="Calibri"/>
+                <a:sym typeface="Calibri"/>
+              </a:rPr>
+              <a:t> </a:t>
+            </a:r>
+            <a:endParaRPr sz="1300">
+              <a:solidFill>
+                <a:schemeClr val="dk1"/>
+              </a:solidFill>
+              <a:latin typeface="Calibri"/>
+              <a:ea typeface="Calibri"/>
+              <a:cs typeface="Calibri"/>
+              <a:sym typeface="Calibri"/>
+            </a:endParaRPr>
+          </a:p>
+        </p:txBody>
+      </p:sp>
+      <p:sp>
+        <p:nvSpPr>
+          <p:cNvPr id="137" name="Google Shape;137;p21"/>
+          <p:cNvSpPr txBox="1"/>
+          <p:nvPr/>
+        </p:nvSpPr>
+        <p:spPr>
+          <a:xfrm>
+            <a:off x="4680925" y="2644675"/>
+            <a:ext cx="4401600" cy="818700"/>
+          </a:xfrm>
+          <a:prstGeom prst="rect">
+            <a:avLst/>
+          </a:prstGeom>
+          <a:solidFill>
+            <a:srgbClr val="FFF2CC"/>
+          </a:solidFill>
+          <a:ln w="9525" cap="flat" cmpd="sng">
+            <a:solidFill>
+              <a:srgbClr val="FF0000"/>
+            </a:solidFill>
+            <a:prstDash val="solid"/>
+            <a:round/>
+            <a:headEnd type="none" w="sm" len="sm"/>
+            <a:tailEnd type="none" w="sm" len="sm"/>
+          </a:ln>
+        </p:spPr>
+        <p:txBody>
+          <a:bodyPr spcFirstLastPara="1" wrap="square" lIns="9125" tIns="9125" rIns="9125" bIns="9125" anchor="t" anchorCtr="0">
+            <a:spAutoFit/>
+          </a:bodyPr>
+          <a:lstStyle/>
+          <a:p>
+            <a:pPr marL="0" lvl="0" indent="0" algn="l" rtl="0">
+              <a:spcBef>
+                <a:spcPts val="0"/>
+              </a:spcBef>
+              <a:spcAft>
+                <a:spcPts val="0"/>
+              </a:spcAft>
+              <a:buNone/>
+            </a:pPr>
+            <a:r>
+              <a:rPr lang="en" sz="1300">
+                <a:solidFill>
+                  <a:schemeClr val="dk1"/>
+                </a:solidFill>
+                <a:latin typeface="Calibri"/>
+                <a:ea typeface="Calibri"/>
+                <a:cs typeface="Calibri"/>
+                <a:sym typeface="Calibri"/>
+              </a:rPr>
+              <a:t>Ollama is a company founded in July 2023 by Jeffrey Morgan and Michael Chiang in Toronto, Ontario, Canada</a:t>
+            </a:r>
+            <a:endParaRPr sz="1300">
+              <a:solidFill>
+                <a:schemeClr val="dk1"/>
+              </a:solidFill>
+              <a:latin typeface="Calibri"/>
+              <a:ea typeface="Calibri"/>
+              <a:cs typeface="Calibri"/>
+              <a:sym typeface="Calibri"/>
+            </a:endParaRPr>
+          </a:p>
+          <a:p>
+            <a:pPr marL="0" lvl="0" indent="0" algn="l" rtl="0">
+              <a:spcBef>
+                <a:spcPts val="0"/>
+              </a:spcBef>
+              <a:spcAft>
+                <a:spcPts val="0"/>
+              </a:spcAft>
+              <a:buNone/>
+            </a:pPr>
+            <a:r>
+              <a:rPr lang="en" sz="1300" u="sng">
+                <a:solidFill>
+                  <a:schemeClr val="hlink"/>
+                </a:solidFill>
+                <a:latin typeface="Calibri"/>
+                <a:ea typeface="Calibri"/>
+                <a:cs typeface="Calibri"/>
+                <a:sym typeface="Calibri"/>
+                <a:hlinkClick r:id="rId5"/>
+              </a:rPr>
+              <a:t>https://www.linkedin.com/in/jmorganca/</a:t>
+            </a:r>
+            <a:endParaRPr sz="1300">
+              <a:solidFill>
+                <a:schemeClr val="dk1"/>
+              </a:solidFill>
+              <a:latin typeface="Calibri"/>
+              <a:ea typeface="Calibri"/>
+              <a:cs typeface="Calibri"/>
+              <a:sym typeface="Calibri"/>
+            </a:endParaRPr>
+          </a:p>
+          <a:p>
+            <a:pPr marL="0" lvl="0" indent="0" algn="l" rtl="0">
+              <a:spcBef>
+                <a:spcPts val="0"/>
+              </a:spcBef>
+              <a:spcAft>
+                <a:spcPts val="0"/>
+              </a:spcAft>
+              <a:buNone/>
+            </a:pPr>
+            <a:r>
+              <a:rPr lang="en" sz="1300" u="sng">
+                <a:solidFill>
+                  <a:schemeClr val="hlink"/>
+                </a:solidFill>
+                <a:latin typeface="Calibri"/>
+                <a:ea typeface="Calibri"/>
+                <a:cs typeface="Calibri"/>
+                <a:sym typeface="Calibri"/>
+                <a:hlinkClick r:id="rId6"/>
+              </a:rPr>
+              <a:t>https://www.linkedin.com/in/mchiang0610/</a:t>
+            </a:r>
+            <a:r>
+              <a:rPr lang="en" sz="1300">
+                <a:solidFill>
+                  <a:schemeClr val="dk1"/>
+                </a:solidFill>
+                <a:latin typeface="Calibri"/>
+                <a:ea typeface="Calibri"/>
+                <a:cs typeface="Calibri"/>
+                <a:sym typeface="Calibri"/>
+              </a:rPr>
+              <a:t> </a:t>
+            </a:r>
+            <a:endParaRPr sz="1300">
+              <a:solidFill>
+                <a:schemeClr val="dk1"/>
+              </a:solidFill>
+              <a:latin typeface="Calibri"/>
+              <a:ea typeface="Calibri"/>
+              <a:cs typeface="Calibri"/>
+              <a:sym typeface="Calibri"/>
+            </a:endParaRPr>
+          </a:p>
+        </p:txBody>
+      </p:sp>
+      <p:pic>
+        <p:nvPicPr>
+          <p:cNvPr id="138" name="Google Shape;138;p21"/>
+          <p:cNvPicPr preferRelativeResize="0"/>
+          <p:nvPr/>
+        </p:nvPicPr>
+        <p:blipFill>
+          <a:blip r:embed="rId7" cstate="email">
+            <a:alphaModFix/>
+            <a:extLst>
+              <a:ext uri="{28A0092B-C50C-407E-A947-70E740481C1C}">
+                <a14:useLocalDpi xmlns:a14="http://schemas.microsoft.com/office/drawing/2010/main"/>
+              </a:ext>
+            </a:extLst>
+          </a:blip>
+          <a:stretch>
+            <a:fillRect/>
+          </a:stretch>
+        </p:blipFill>
+        <p:spPr>
+          <a:xfrm>
+            <a:off x="4802224" y="62850"/>
+            <a:ext cx="4280301" cy="1070075"/>
+          </a:xfrm>
+          <a:prstGeom prst="rect">
+            <a:avLst/>
+          </a:prstGeom>
+          <a:noFill/>
+          <a:ln>
+            <a:noFill/>
+          </a:ln>
+        </p:spPr>
+      </p:pic>
+    </p:spTree>
+  </p:cSld>
+  <p:clrMapOvr>
+    <a:masterClrMapping/>
+  </p:clrMapOvr>
+</p:sld>
+</file>
+
+<file path=ppt/slides/slide9.xml><?xml version="1.0" encoding="utf-8"?>
+<p:sld xmlns:a="http://schemas.openxmlformats.org/drawingml/2006/main" xmlns:r="http://schemas.openxmlformats.org/officeDocument/2006/relationships" xmlns:p="http://schemas.openxmlformats.org/presentationml/2006/main">
+  <p:cSld>
+    <p:spTree>
+      <p:nvGrpSpPr>
+        <p:cNvPr id="1" name="Shape 142"/>
+        <p:cNvGrpSpPr/>
+        <p:nvPr/>
+      </p:nvGrpSpPr>
+      <p:grpSpPr>
+        <a:xfrm>
+          <a:off x="0" y="0"/>
+          <a:ext cx="0" cy="0"/>
+          <a:chOff x="0" y="0"/>
+          <a:chExt cx="0" cy="0"/>
+        </a:xfrm>
+      </p:grpSpPr>
+      <p:sp>
+        <p:nvSpPr>
+          <p:cNvPr id="143" name="Google Shape;143;p22"/>
+          <p:cNvSpPr txBox="1"/>
+          <p:nvPr/>
+        </p:nvSpPr>
+        <p:spPr>
+          <a:xfrm>
+            <a:off x="76200" y="0"/>
             <a:ext cx="1930200" cy="326400"/>
           </a:xfrm>
           <a:prstGeom prst="rect">
@@ -23865,7 +26529,7 @@
       </p:sp>
       <p:sp>
         <p:nvSpPr>
-          <p:cNvPr id="135" name="Google Shape;135;p21"/>
+          <p:cNvPr id="144" name="Google Shape;144;p22"/>
           <p:cNvSpPr txBox="1"/>
           <p:nvPr/>
         </p:nvSpPr>
@@ -24129,7 +26793,7 @@
       </p:sp>
       <p:sp>
         <p:nvSpPr>
-          <p:cNvPr id="136" name="Google Shape;136;p21"/>
+          <p:cNvPr id="145" name="Google Shape;145;p22"/>
           <p:cNvSpPr txBox="1"/>
           <p:nvPr/>
         </p:nvSpPr>
@@ -24340,7 +27004,7 @@
       </p:sp>
       <p:pic>
         <p:nvPicPr>
-          <p:cNvPr id="137" name="Google Shape;137;p21"/>
+          <p:cNvPr id="146" name="Google Shape;146;p22"/>
           <p:cNvPicPr preferRelativeResize="0"/>
           <p:nvPr/>
         </p:nvPicPr>
@@ -24378,7 +27042,7 @@
       </p:pic>
       <p:sp>
         <p:nvSpPr>
-          <p:cNvPr id="138" name="Google Shape;138;p21"/>
+          <p:cNvPr id="147" name="Google Shape;147;p22"/>
           <p:cNvSpPr txBox="1"/>
           <p:nvPr/>
         </p:nvSpPr>
@@ -24441,7 +27105,7 @@
       </p:sp>
       <p:pic>
         <p:nvPicPr>
-          <p:cNvPr id="139" name="Google Shape;139;p21"/>
+          <p:cNvPr id="148" name="Google Shape;148;p22"/>
           <p:cNvPicPr preferRelativeResize="0"/>
           <p:nvPr/>
         </p:nvPicPr>
@@ -24474,7 +27138,7 @@
       </p:pic>
       <p:pic>
         <p:nvPicPr>
-          <p:cNvPr id="140" name="Google Shape;140;p21"/>
+          <p:cNvPr id="149" name="Google Shape;149;p22"/>
           <p:cNvPicPr preferRelativeResize="0"/>
           <p:nvPr/>
         </p:nvPicPr>
@@ -24513,7 +27177,7 @@
       </p:pic>
       <p:sp>
         <p:nvSpPr>
-          <p:cNvPr id="141" name="Google Shape;141;p21"/>
+          <p:cNvPr id="150" name="Google Shape;150;p22"/>
           <p:cNvSpPr txBox="1"/>
           <p:nvPr/>
         </p:nvSpPr>
@@ -24689,937 +27353,6 @@
           </a:p>
         </p:txBody>
       </p:sp>
-    </p:spTree>
-  </p:cSld>
-  <p:clrMapOvr>
-    <a:masterClrMapping/>
-  </p:clrMapOvr>
-</p:sld>
-</file>
-
-<file path=ppt/slides/slide9.xml><?xml version="1.0" encoding="utf-8"?>
-<p:sld xmlns:a="http://schemas.openxmlformats.org/drawingml/2006/main" xmlns:r="http://schemas.openxmlformats.org/officeDocument/2006/relationships" xmlns:p="http://schemas.openxmlformats.org/presentationml/2006/main">
-  <p:cSld>
-    <p:spTree>
-      <p:nvGrpSpPr>
-        <p:cNvPr id="1" name="Shape 145"/>
-        <p:cNvGrpSpPr/>
-        <p:nvPr/>
-      </p:nvGrpSpPr>
-      <p:grpSpPr>
-        <a:xfrm>
-          <a:off x="0" y="0"/>
-          <a:ext cx="0" cy="0"/>
-          <a:chOff x="0" y="0"/>
-          <a:chExt cx="0" cy="0"/>
-        </a:xfrm>
-      </p:grpSpPr>
-      <p:sp>
-        <p:nvSpPr>
-          <p:cNvPr id="146" name="Google Shape;146;p22"/>
-          <p:cNvSpPr txBox="1"/>
-          <p:nvPr/>
-        </p:nvSpPr>
-        <p:spPr>
-          <a:xfrm>
-            <a:off x="76200" y="0"/>
-            <a:ext cx="1930200" cy="326400"/>
-          </a:xfrm>
-          <a:prstGeom prst="rect">
-            <a:avLst/>
-          </a:prstGeom>
-          <a:noFill/>
-          <a:ln>
-            <a:noFill/>
-          </a:ln>
-        </p:spPr>
-        <p:txBody>
-          <a:bodyPr spcFirstLastPara="1" wrap="square" lIns="9125" tIns="9125" rIns="9125" bIns="9125" anchor="t" anchorCtr="0">
-            <a:spAutoFit/>
-          </a:bodyPr>
-          <a:lstStyle/>
-          <a:p>
-            <a:pPr marL="0" lvl="0" indent="0" algn="l" rtl="0">
-              <a:spcBef>
-                <a:spcPts val="0"/>
-              </a:spcBef>
-              <a:spcAft>
-                <a:spcPts val="0"/>
-              </a:spcAft>
-              <a:buClr>
-                <a:schemeClr val="dk1"/>
-              </a:buClr>
-              <a:buSzPts val="1100"/>
-              <a:buFont typeface="Arial"/>
-              <a:buNone/>
-            </a:pPr>
-            <a:r>
-              <a:rPr lang="en" sz="2000" b="1">
-                <a:solidFill>
-                  <a:schemeClr val="dk1"/>
-                </a:solidFill>
-                <a:latin typeface="Calibri"/>
-                <a:ea typeface="Calibri"/>
-                <a:cs typeface="Calibri"/>
-                <a:sym typeface="Calibri"/>
-              </a:rPr>
-              <a:t>Misc 4</a:t>
-            </a:r>
-            <a:endParaRPr sz="2000" b="1">
-              <a:solidFill>
-                <a:schemeClr val="dk1"/>
-              </a:solidFill>
-              <a:latin typeface="Calibri"/>
-              <a:ea typeface="Calibri"/>
-              <a:cs typeface="Calibri"/>
-              <a:sym typeface="Calibri"/>
-            </a:endParaRPr>
-          </a:p>
-        </p:txBody>
-      </p:sp>
-      <p:sp>
-        <p:nvSpPr>
-          <p:cNvPr id="147" name="Google Shape;147;p22"/>
-          <p:cNvSpPr txBox="1"/>
-          <p:nvPr/>
-        </p:nvSpPr>
-        <p:spPr>
-          <a:xfrm>
-            <a:off x="70925" y="374800"/>
-            <a:ext cx="4478100" cy="618600"/>
-          </a:xfrm>
-          <a:prstGeom prst="rect">
-            <a:avLst/>
-          </a:prstGeom>
-          <a:solidFill>
-            <a:srgbClr val="FFF2CC"/>
-          </a:solidFill>
-          <a:ln w="9525" cap="flat" cmpd="sng">
-            <a:solidFill>
-              <a:srgbClr val="FF0000"/>
-            </a:solidFill>
-            <a:prstDash val="solid"/>
-            <a:round/>
-            <a:headEnd type="none" w="sm" len="sm"/>
-            <a:tailEnd type="none" w="sm" len="sm"/>
-          </a:ln>
-        </p:spPr>
-        <p:txBody>
-          <a:bodyPr spcFirstLastPara="1" wrap="square" lIns="9125" tIns="9125" rIns="9125" bIns="9125" anchor="t" anchorCtr="0">
-            <a:spAutoFit/>
-          </a:bodyPr>
-          <a:lstStyle/>
-          <a:p>
-            <a:pPr marL="0" lvl="0" indent="0" algn="l" rtl="0">
-              <a:spcBef>
-                <a:spcPts val="0"/>
-              </a:spcBef>
-              <a:spcAft>
-                <a:spcPts val="0"/>
-              </a:spcAft>
-              <a:buNone/>
-            </a:pPr>
-            <a:r>
-              <a:rPr lang="en" sz="1300" b="1">
-                <a:solidFill>
-                  <a:srgbClr val="FF0000"/>
-                </a:solidFill>
-                <a:latin typeface="Calibri"/>
-                <a:ea typeface="Calibri"/>
-                <a:cs typeface="Calibri"/>
-                <a:sym typeface="Calibri"/>
-              </a:rPr>
-              <a:t>Andrej Karpathy's YouTube playlist on Neural Networks</a:t>
-            </a:r>
-            <a:endParaRPr sz="1300">
-              <a:solidFill>
-                <a:schemeClr val="dk1"/>
-              </a:solidFill>
-              <a:latin typeface="Calibri"/>
-              <a:ea typeface="Calibri"/>
-              <a:cs typeface="Calibri"/>
-              <a:sym typeface="Calibri"/>
-            </a:endParaRPr>
-          </a:p>
-          <a:p>
-            <a:pPr marL="0" lvl="0" indent="0" algn="l" rtl="0">
-              <a:spcBef>
-                <a:spcPts val="0"/>
-              </a:spcBef>
-              <a:spcAft>
-                <a:spcPts val="0"/>
-              </a:spcAft>
-              <a:buNone/>
-            </a:pPr>
-            <a:r>
-              <a:rPr lang="en" sz="1300" u="sng">
-                <a:solidFill>
-                  <a:schemeClr val="hlink"/>
-                </a:solidFill>
-                <a:latin typeface="Calibri"/>
-                <a:ea typeface="Calibri"/>
-                <a:cs typeface="Calibri"/>
-                <a:sym typeface="Calibri"/>
-                <a:hlinkClick r:id="rId3"/>
-              </a:rPr>
-              <a:t>https://www.youtube.com/playlist?list=PLAqhIrjkxbuWI23v9cThsA9GvCAUhRvKZ</a:t>
-            </a:r>
-            <a:r>
-              <a:rPr lang="en" sz="1300">
-                <a:solidFill>
-                  <a:schemeClr val="dk1"/>
-                </a:solidFill>
-                <a:latin typeface="Calibri"/>
-                <a:ea typeface="Calibri"/>
-                <a:cs typeface="Calibri"/>
-                <a:sym typeface="Calibri"/>
-              </a:rPr>
-              <a:t> </a:t>
-            </a:r>
-            <a:endParaRPr sz="1300">
-              <a:solidFill>
-                <a:schemeClr val="dk1"/>
-              </a:solidFill>
-              <a:latin typeface="Calibri"/>
-              <a:ea typeface="Calibri"/>
-              <a:cs typeface="Calibri"/>
-              <a:sym typeface="Calibri"/>
-            </a:endParaRPr>
-          </a:p>
-        </p:txBody>
-      </p:sp>
-      <p:pic>
-        <p:nvPicPr>
-          <p:cNvPr id="148" name="Google Shape;148;p22"/>
-          <p:cNvPicPr preferRelativeResize="0"/>
-          <p:nvPr/>
-        </p:nvPicPr>
-        <p:blipFill>
-          <a:blip r:embed="rId4" cstate="email">
-            <a:alphaModFix/>
-            <a:extLst>
-              <a:ext uri="{28A0092B-C50C-407E-A947-70E740481C1C}">
-                <a14:useLocalDpi xmlns:a14="http://schemas.microsoft.com/office/drawing/2010/main"/>
-              </a:ext>
-            </a:extLst>
-          </a:blip>
-          <a:stretch>
-            <a:fillRect/>
-          </a:stretch>
-        </p:blipFill>
-        <p:spPr>
-          <a:xfrm>
-            <a:off x="76200" y="1041800"/>
-            <a:ext cx="4478100" cy="3271116"/>
-          </a:xfrm>
-          <a:prstGeom prst="rect">
-            <a:avLst/>
-          </a:prstGeom>
-          <a:noFill/>
-          <a:ln w="9525" cap="flat" cmpd="sng">
-            <a:solidFill>
-              <a:srgbClr val="FF0000"/>
-            </a:solidFill>
-            <a:prstDash val="solid"/>
-            <a:round/>
-            <a:headEnd type="none" w="sm" len="sm"/>
-            <a:tailEnd type="none" w="sm" len="sm"/>
-          </a:ln>
-        </p:spPr>
-      </p:pic>
-      <p:sp>
-        <p:nvSpPr>
-          <p:cNvPr id="149" name="Google Shape;149;p22"/>
-          <p:cNvSpPr txBox="1"/>
-          <p:nvPr/>
-        </p:nvSpPr>
-        <p:spPr>
-          <a:xfrm>
-            <a:off x="4615845" y="374800"/>
-            <a:ext cx="4478100" cy="818700"/>
-          </a:xfrm>
-          <a:prstGeom prst="rect">
-            <a:avLst/>
-          </a:prstGeom>
-          <a:solidFill>
-            <a:srgbClr val="FFF2CC"/>
-          </a:solidFill>
-          <a:ln w="9525" cap="flat" cmpd="sng">
-            <a:solidFill>
-              <a:srgbClr val="FF0000"/>
-            </a:solidFill>
-            <a:prstDash val="solid"/>
-            <a:round/>
-            <a:headEnd type="none" w="sm" len="sm"/>
-            <a:tailEnd type="none" w="sm" len="sm"/>
-          </a:ln>
-        </p:spPr>
-        <p:txBody>
-          <a:bodyPr spcFirstLastPara="1" wrap="square" lIns="9125" tIns="9125" rIns="9125" bIns="9125" anchor="t" anchorCtr="0">
-            <a:spAutoFit/>
-          </a:bodyPr>
-          <a:lstStyle/>
-          <a:p>
-            <a:pPr marL="0" lvl="0" indent="0" algn="l" rtl="0">
-              <a:spcBef>
-                <a:spcPts val="0"/>
-              </a:spcBef>
-              <a:spcAft>
-                <a:spcPts val="0"/>
-              </a:spcAft>
-              <a:buClr>
-                <a:schemeClr val="dk1"/>
-              </a:buClr>
-              <a:buSzPts val="1100"/>
-              <a:buFont typeface="Arial"/>
-              <a:buNone/>
-            </a:pPr>
-            <a:r>
-              <a:rPr lang="en" sz="1300" b="1">
-                <a:solidFill>
-                  <a:srgbClr val="FF0000"/>
-                </a:solidFill>
-                <a:latin typeface="Calibri"/>
-                <a:ea typeface="Calibri"/>
-                <a:cs typeface="Calibri"/>
-                <a:sym typeface="Calibri"/>
-              </a:rPr>
-              <a:t>Yann LeCun: Fine-tuned Llama 3.1 8B blows GPT-4o mini out of the water on every task.</a:t>
-            </a:r>
-            <a:r>
-              <a:rPr lang="en" sz="1300">
-                <a:solidFill>
-                  <a:schemeClr val="dk1"/>
-                </a:solidFill>
-                <a:latin typeface="Calibri"/>
-                <a:ea typeface="Calibri"/>
-                <a:cs typeface="Calibri"/>
-                <a:sym typeface="Calibri"/>
-              </a:rPr>
-              <a:t> </a:t>
-            </a:r>
-            <a:r>
-              <a:rPr lang="en" sz="1300" b="1">
-                <a:solidFill>
-                  <a:srgbClr val="3C78D8"/>
-                </a:solidFill>
-                <a:latin typeface="Calibri"/>
-                <a:ea typeface="Calibri"/>
-                <a:cs typeface="Calibri"/>
-                <a:sym typeface="Calibri"/>
-              </a:rPr>
-              <a:t>There has never been an open model this small, this good.</a:t>
-            </a:r>
-            <a:endParaRPr sz="1300" b="1">
-              <a:solidFill>
-                <a:srgbClr val="3C78D8"/>
-              </a:solidFill>
-              <a:latin typeface="Calibri"/>
-              <a:ea typeface="Calibri"/>
-              <a:cs typeface="Calibri"/>
-              <a:sym typeface="Calibri"/>
-            </a:endParaRPr>
-          </a:p>
-          <a:p>
-            <a:pPr marL="0" lvl="0" indent="0" algn="l" rtl="0">
-              <a:spcBef>
-                <a:spcPts val="0"/>
-              </a:spcBef>
-              <a:spcAft>
-                <a:spcPts val="0"/>
-              </a:spcAft>
-              <a:buNone/>
-            </a:pPr>
-            <a:r>
-              <a:rPr lang="en" sz="1300" u="sng">
-                <a:solidFill>
-                  <a:schemeClr val="hlink"/>
-                </a:solidFill>
-                <a:latin typeface="Calibri"/>
-                <a:ea typeface="Calibri"/>
-                <a:cs typeface="Calibri"/>
-                <a:sym typeface="Calibri"/>
-                <a:hlinkClick r:id="rId5"/>
-              </a:rPr>
-              <a:t>https://twitter.com/ylecun/status/1815858771610210756</a:t>
-            </a:r>
-            <a:r>
-              <a:rPr lang="en" sz="1300">
-                <a:solidFill>
-                  <a:schemeClr val="dk1"/>
-                </a:solidFill>
-                <a:latin typeface="Calibri"/>
-                <a:ea typeface="Calibri"/>
-                <a:cs typeface="Calibri"/>
-                <a:sym typeface="Calibri"/>
-              </a:rPr>
-              <a:t> </a:t>
-            </a:r>
-            <a:endParaRPr sz="1300">
-              <a:solidFill>
-                <a:schemeClr val="dk1"/>
-              </a:solidFill>
-              <a:latin typeface="Calibri"/>
-              <a:ea typeface="Calibri"/>
-              <a:cs typeface="Calibri"/>
-              <a:sym typeface="Calibri"/>
-            </a:endParaRPr>
-          </a:p>
-        </p:txBody>
-      </p:sp>
-      <p:sp>
-        <p:nvSpPr>
-          <p:cNvPr id="150" name="Google Shape;150;p22"/>
-          <p:cNvSpPr txBox="1"/>
-          <p:nvPr/>
-        </p:nvSpPr>
-        <p:spPr>
-          <a:xfrm>
-            <a:off x="4615845" y="1255425"/>
-            <a:ext cx="4478100" cy="618600"/>
-          </a:xfrm>
-          <a:prstGeom prst="rect">
-            <a:avLst/>
-          </a:prstGeom>
-          <a:solidFill>
-            <a:srgbClr val="FFF2CC"/>
-          </a:solidFill>
-          <a:ln w="9525" cap="flat" cmpd="sng">
-            <a:solidFill>
-              <a:srgbClr val="FF0000"/>
-            </a:solidFill>
-            <a:prstDash val="solid"/>
-            <a:round/>
-            <a:headEnd type="none" w="sm" len="sm"/>
-            <a:tailEnd type="none" w="sm" len="sm"/>
-          </a:ln>
-        </p:spPr>
-        <p:txBody>
-          <a:bodyPr spcFirstLastPara="1" wrap="square" lIns="9125" tIns="9125" rIns="9125" bIns="9125" anchor="t" anchorCtr="0">
-            <a:spAutoFit/>
-          </a:bodyPr>
-          <a:lstStyle/>
-          <a:p>
-            <a:pPr marL="0" lvl="0" indent="0" algn="l" rtl="0">
-              <a:spcBef>
-                <a:spcPts val="0"/>
-              </a:spcBef>
-              <a:spcAft>
-                <a:spcPts val="0"/>
-              </a:spcAft>
-              <a:buNone/>
-            </a:pPr>
-            <a:r>
-              <a:rPr lang="en" sz="1300" b="1">
-                <a:solidFill>
-                  <a:srgbClr val="FF0000"/>
-                </a:solidFill>
-                <a:latin typeface="Calibri"/>
-                <a:ea typeface="Calibri"/>
-                <a:cs typeface="Calibri"/>
-                <a:sym typeface="Calibri"/>
-              </a:rPr>
-              <a:t>PandasAI </a:t>
-            </a:r>
-            <a:r>
-              <a:rPr lang="en" sz="1300">
-                <a:solidFill>
-                  <a:schemeClr val="dk1"/>
-                </a:solidFill>
-                <a:latin typeface="Calibri"/>
-                <a:ea typeface="Calibri"/>
-                <a:cs typeface="Calibri"/>
-                <a:sym typeface="Calibri"/>
-              </a:rPr>
-              <a:t>is a Python platform that makes it easy to ask questions to your data in natural language.</a:t>
-            </a:r>
-            <a:endParaRPr sz="1300">
-              <a:solidFill>
-                <a:schemeClr val="dk1"/>
-              </a:solidFill>
-              <a:latin typeface="Calibri"/>
-              <a:ea typeface="Calibri"/>
-              <a:cs typeface="Calibri"/>
-              <a:sym typeface="Calibri"/>
-            </a:endParaRPr>
-          </a:p>
-          <a:p>
-            <a:pPr marL="0" lvl="0" indent="0" algn="l" rtl="0">
-              <a:spcBef>
-                <a:spcPts val="0"/>
-              </a:spcBef>
-              <a:spcAft>
-                <a:spcPts val="0"/>
-              </a:spcAft>
-              <a:buNone/>
-            </a:pPr>
-            <a:r>
-              <a:rPr lang="en" sz="1300" u="sng">
-                <a:solidFill>
-                  <a:schemeClr val="hlink"/>
-                </a:solidFill>
-                <a:latin typeface="Calibri"/>
-                <a:ea typeface="Calibri"/>
-                <a:cs typeface="Calibri"/>
-                <a:sym typeface="Calibri"/>
-                <a:hlinkClick r:id="rId6"/>
-              </a:rPr>
-              <a:t>https://github.com/Sinaptik-AI/pandas-ai</a:t>
-            </a:r>
-            <a:endParaRPr sz="1300">
-              <a:solidFill>
-                <a:schemeClr val="dk1"/>
-              </a:solidFill>
-              <a:latin typeface="Calibri"/>
-              <a:ea typeface="Calibri"/>
-              <a:cs typeface="Calibri"/>
-              <a:sym typeface="Calibri"/>
-            </a:endParaRPr>
-          </a:p>
-        </p:txBody>
-      </p:sp>
-      <p:pic>
-        <p:nvPicPr>
-          <p:cNvPr id="151" name="Google Shape;151;p22"/>
-          <p:cNvPicPr preferRelativeResize="0"/>
-          <p:nvPr/>
-        </p:nvPicPr>
-        <p:blipFill>
-          <a:blip r:embed="rId7" cstate="email">
-            <a:alphaModFix/>
-            <a:extLst>
-              <a:ext uri="{28A0092B-C50C-407E-A947-70E740481C1C}">
-                <a14:useLocalDpi xmlns:a14="http://schemas.microsoft.com/office/drawing/2010/main"/>
-              </a:ext>
-            </a:extLst>
-          </a:blip>
-          <a:stretch>
-            <a:fillRect/>
-          </a:stretch>
-        </p:blipFill>
-        <p:spPr>
-          <a:xfrm>
-            <a:off x="5946398" y="1943950"/>
-            <a:ext cx="2118501" cy="618600"/>
-          </a:xfrm>
-          <a:prstGeom prst="rect">
-            <a:avLst/>
-          </a:prstGeom>
-          <a:noFill/>
-          <a:ln>
-            <a:noFill/>
-          </a:ln>
-        </p:spPr>
-      </p:pic>
-      <p:sp>
-        <p:nvSpPr>
-          <p:cNvPr id="152" name="Google Shape;152;p22"/>
-          <p:cNvSpPr txBox="1"/>
-          <p:nvPr/>
-        </p:nvSpPr>
-        <p:spPr>
-          <a:xfrm>
-            <a:off x="4615845" y="2632475"/>
-            <a:ext cx="4478100" cy="680400"/>
-          </a:xfrm>
-          <a:prstGeom prst="rect">
-            <a:avLst/>
-          </a:prstGeom>
-          <a:solidFill>
-            <a:srgbClr val="FFF2CC"/>
-          </a:solidFill>
-          <a:ln w="9525" cap="flat" cmpd="sng">
-            <a:solidFill>
-              <a:srgbClr val="FF0000"/>
-            </a:solidFill>
-            <a:prstDash val="solid"/>
-            <a:round/>
-            <a:headEnd type="none" w="sm" len="sm"/>
-            <a:tailEnd type="none" w="sm" len="sm"/>
-          </a:ln>
-        </p:spPr>
-        <p:txBody>
-          <a:bodyPr spcFirstLastPara="1" wrap="square" lIns="9125" tIns="9125" rIns="9125" bIns="9125" anchor="t" anchorCtr="0">
-            <a:spAutoFit/>
-          </a:bodyPr>
-          <a:lstStyle/>
-          <a:p>
-            <a:pPr marL="0" lvl="0" indent="0" algn="l" rtl="0">
-              <a:spcBef>
-                <a:spcPts val="0"/>
-              </a:spcBef>
-              <a:spcAft>
-                <a:spcPts val="0"/>
-              </a:spcAft>
-              <a:buNone/>
-            </a:pPr>
-            <a:r>
-              <a:rPr lang="en" sz="1300" b="1">
-                <a:solidFill>
-                  <a:srgbClr val="FF0000"/>
-                </a:solidFill>
-                <a:latin typeface="Calibri"/>
-                <a:ea typeface="Calibri"/>
-                <a:cs typeface="Calibri"/>
-                <a:sym typeface="Calibri"/>
-              </a:rPr>
-              <a:t>CARTE: Pretraining and Transfer for Tabular Learning</a:t>
-            </a:r>
-            <a:endParaRPr sz="1300" b="1">
-              <a:solidFill>
-                <a:srgbClr val="FF0000"/>
-              </a:solidFill>
-              <a:latin typeface="Calibri"/>
-              <a:ea typeface="Calibri"/>
-              <a:cs typeface="Calibri"/>
-              <a:sym typeface="Calibri"/>
-            </a:endParaRPr>
-          </a:p>
-          <a:p>
-            <a:pPr marL="228600" lvl="0" indent="-120650" algn="l" rtl="0">
-              <a:spcBef>
-                <a:spcPts val="0"/>
-              </a:spcBef>
-              <a:spcAft>
-                <a:spcPts val="0"/>
-              </a:spcAft>
-              <a:buSzPts val="1000"/>
-              <a:buFont typeface="Calibri"/>
-              <a:buChar char="●"/>
-            </a:pPr>
-            <a:r>
-              <a:rPr lang="en" sz="1000" u="sng">
-                <a:solidFill>
-                  <a:schemeClr val="hlink"/>
-                </a:solidFill>
-                <a:latin typeface="Calibri"/>
-                <a:ea typeface="Calibri"/>
-                <a:cs typeface="Calibri"/>
-                <a:sym typeface="Calibri"/>
-                <a:hlinkClick r:id="rId8"/>
-              </a:rPr>
-              <a:t>https://arxiv.org/abs/2402.16785</a:t>
-            </a:r>
-            <a:endParaRPr sz="1000">
-              <a:solidFill>
-                <a:schemeClr val="dk1"/>
-              </a:solidFill>
-              <a:latin typeface="Calibri"/>
-              <a:ea typeface="Calibri"/>
-              <a:cs typeface="Calibri"/>
-              <a:sym typeface="Calibri"/>
-            </a:endParaRPr>
-          </a:p>
-          <a:p>
-            <a:pPr marL="228600" lvl="0" indent="-120650" algn="l" rtl="0">
-              <a:spcBef>
-                <a:spcPts val="0"/>
-              </a:spcBef>
-              <a:spcAft>
-                <a:spcPts val="0"/>
-              </a:spcAft>
-              <a:buSzPts val="1000"/>
-              <a:buFont typeface="Calibri"/>
-              <a:buChar char="●"/>
-            </a:pPr>
-            <a:r>
-              <a:rPr lang="en" sz="1000" u="sng">
-                <a:solidFill>
-                  <a:schemeClr val="hlink"/>
-                </a:solidFill>
-                <a:latin typeface="Calibri"/>
-                <a:ea typeface="Calibri"/>
-                <a:cs typeface="Calibri"/>
-                <a:sym typeface="Calibri"/>
-                <a:hlinkClick r:id="rId9"/>
-              </a:rPr>
-              <a:t>https://gael-varoquaux.info/science/carte-toward-table-foundation-models.html</a:t>
-            </a:r>
-            <a:endParaRPr sz="1000">
-              <a:solidFill>
-                <a:schemeClr val="dk1"/>
-              </a:solidFill>
-              <a:latin typeface="Calibri"/>
-              <a:ea typeface="Calibri"/>
-              <a:cs typeface="Calibri"/>
-              <a:sym typeface="Calibri"/>
-            </a:endParaRPr>
-          </a:p>
-          <a:p>
-            <a:pPr marL="228600" lvl="0" indent="-120650" algn="l" rtl="0">
-              <a:spcBef>
-                <a:spcPts val="0"/>
-              </a:spcBef>
-              <a:spcAft>
-                <a:spcPts val="0"/>
-              </a:spcAft>
-              <a:buSzPts val="1000"/>
-              <a:buFont typeface="Calibri"/>
-              <a:buChar char="●"/>
-            </a:pPr>
-            <a:r>
-              <a:rPr lang="en" sz="1000" u="sng">
-                <a:solidFill>
-                  <a:schemeClr val="hlink"/>
-                </a:solidFill>
-                <a:latin typeface="Calibri"/>
-                <a:ea typeface="Calibri"/>
-                <a:cs typeface="Calibri"/>
-                <a:sym typeface="Calibri"/>
-                <a:hlinkClick r:id="rId10"/>
-              </a:rPr>
-              <a:t>https://x.com/GaelVaroquaux/status/1814198479045931141</a:t>
-            </a:r>
-            <a:r>
-              <a:rPr lang="en" sz="1000">
-                <a:solidFill>
-                  <a:schemeClr val="dk1"/>
-                </a:solidFill>
-                <a:latin typeface="Calibri"/>
-                <a:ea typeface="Calibri"/>
-                <a:cs typeface="Calibri"/>
-                <a:sym typeface="Calibri"/>
-              </a:rPr>
-              <a:t>  </a:t>
-            </a:r>
-            <a:endParaRPr sz="1000">
-              <a:solidFill>
-                <a:schemeClr val="dk1"/>
-              </a:solidFill>
-              <a:latin typeface="Calibri"/>
-              <a:ea typeface="Calibri"/>
-              <a:cs typeface="Calibri"/>
-              <a:sym typeface="Calibri"/>
-            </a:endParaRPr>
-          </a:p>
-        </p:txBody>
-      </p:sp>
-      <p:sp>
-        <p:nvSpPr>
-          <p:cNvPr id="153" name="Google Shape;153;p22"/>
-          <p:cNvSpPr txBox="1"/>
-          <p:nvPr/>
-        </p:nvSpPr>
-        <p:spPr>
-          <a:xfrm>
-            <a:off x="4615850" y="3386625"/>
-            <a:ext cx="2565000" cy="695700"/>
-          </a:xfrm>
-          <a:prstGeom prst="rect">
-            <a:avLst/>
-          </a:prstGeom>
-          <a:solidFill>
-            <a:srgbClr val="FFF2CC"/>
-          </a:solidFill>
-          <a:ln w="9525" cap="flat" cmpd="sng">
-            <a:solidFill>
-              <a:srgbClr val="FF0000"/>
-            </a:solidFill>
-            <a:prstDash val="solid"/>
-            <a:round/>
-            <a:headEnd type="none" w="sm" len="sm"/>
-            <a:tailEnd type="none" w="sm" len="sm"/>
-          </a:ln>
-        </p:spPr>
-        <p:txBody>
-          <a:bodyPr spcFirstLastPara="1" wrap="square" lIns="9125" tIns="9125" rIns="9125" bIns="9125" anchor="t" anchorCtr="0">
-            <a:spAutoFit/>
-          </a:bodyPr>
-          <a:lstStyle/>
-          <a:p>
-            <a:pPr marL="0" lvl="0" indent="0" algn="l" rtl="0">
-              <a:spcBef>
-                <a:spcPts val="0"/>
-              </a:spcBef>
-              <a:spcAft>
-                <a:spcPts val="0"/>
-              </a:spcAft>
-              <a:buNone/>
-            </a:pPr>
-            <a:r>
-              <a:rPr lang="en" sz="1300" b="1">
-                <a:solidFill>
-                  <a:srgbClr val="FF0000"/>
-                </a:solidFill>
-                <a:latin typeface="Calibri"/>
-                <a:ea typeface="Calibri"/>
-                <a:cs typeface="Calibri"/>
-                <a:sym typeface="Calibri"/>
-              </a:rPr>
-              <a:t>Deepmind’s AlphaProof </a:t>
-            </a:r>
-            <a:r>
-              <a:rPr lang="en" sz="1300">
-                <a:solidFill>
-                  <a:schemeClr val="dk1"/>
-                </a:solidFill>
-                <a:latin typeface="Calibri"/>
-                <a:ea typeface="Calibri"/>
-                <a:cs typeface="Calibri"/>
-                <a:sym typeface="Calibri"/>
-              </a:rPr>
-              <a:t>scores silver in math olympiad</a:t>
-            </a:r>
-            <a:endParaRPr sz="1300">
-              <a:solidFill>
-                <a:schemeClr val="dk1"/>
-              </a:solidFill>
-              <a:latin typeface="Calibri"/>
-              <a:ea typeface="Calibri"/>
-              <a:cs typeface="Calibri"/>
-              <a:sym typeface="Calibri"/>
-            </a:endParaRPr>
-          </a:p>
-          <a:p>
-            <a:pPr marL="0" lvl="0" indent="0" algn="l" rtl="0">
-              <a:spcBef>
-                <a:spcPts val="0"/>
-              </a:spcBef>
-              <a:spcAft>
-                <a:spcPts val="0"/>
-              </a:spcAft>
-              <a:buNone/>
-            </a:pPr>
-            <a:r>
-              <a:rPr lang="en" sz="900" u="sng">
-                <a:solidFill>
-                  <a:schemeClr val="hlink"/>
-                </a:solidFill>
-                <a:latin typeface="Calibri"/>
-                <a:ea typeface="Calibri"/>
-                <a:cs typeface="Calibri"/>
-                <a:sym typeface="Calibri"/>
-                <a:hlinkClick r:id="rId11"/>
-              </a:rPr>
-              <a:t>https://deepmind.google/discover/blog/ai-solves-imo-problems-at-silver-medal-level/</a:t>
-            </a:r>
-            <a:r>
-              <a:rPr lang="en" sz="900">
-                <a:solidFill>
-                  <a:schemeClr val="dk1"/>
-                </a:solidFill>
-                <a:latin typeface="Calibri"/>
-                <a:ea typeface="Calibri"/>
-                <a:cs typeface="Calibri"/>
-                <a:sym typeface="Calibri"/>
-              </a:rPr>
-              <a:t> </a:t>
-            </a:r>
-            <a:endParaRPr sz="900">
-              <a:solidFill>
-                <a:schemeClr val="dk1"/>
-              </a:solidFill>
-              <a:latin typeface="Calibri"/>
-              <a:ea typeface="Calibri"/>
-              <a:cs typeface="Calibri"/>
-              <a:sym typeface="Calibri"/>
-            </a:endParaRPr>
-          </a:p>
-        </p:txBody>
-      </p:sp>
-      <p:grpSp>
-        <p:nvGrpSpPr>
-          <p:cNvPr id="154" name="Google Shape;154;p22"/>
-          <p:cNvGrpSpPr/>
-          <p:nvPr/>
-        </p:nvGrpSpPr>
-        <p:grpSpPr>
-          <a:xfrm>
-            <a:off x="7248294" y="3386625"/>
-            <a:ext cx="1845656" cy="1667374"/>
-            <a:chOff x="7248294" y="3386625"/>
-            <a:chExt cx="1845656" cy="1667374"/>
-          </a:xfrm>
-        </p:grpSpPr>
-        <p:pic>
-          <p:nvPicPr>
-            <p:cNvPr id="155" name="Google Shape;155;p22"/>
-            <p:cNvPicPr preferRelativeResize="0"/>
-            <p:nvPr/>
-          </p:nvPicPr>
-          <p:blipFill>
-            <a:blip r:embed="rId12" cstate="email">
-              <a:alphaModFix/>
-              <a:extLst>
-                <a:ext uri="{28A0092B-C50C-407E-A947-70E740481C1C}">
-                  <a14:useLocalDpi xmlns:a14="http://schemas.microsoft.com/office/drawing/2010/main"/>
-                </a:ext>
-              </a:extLst>
-            </a:blip>
-            <a:stretch>
-              <a:fillRect/>
-            </a:stretch>
-          </p:blipFill>
-          <p:spPr>
-            <a:xfrm>
-              <a:off x="7248294" y="3386625"/>
-              <a:ext cx="1845656" cy="1667374"/>
-            </a:xfrm>
-            <a:prstGeom prst="rect">
-              <a:avLst/>
-            </a:prstGeom>
-            <a:noFill/>
-            <a:ln w="9525" cap="flat" cmpd="sng">
-              <a:solidFill>
-                <a:srgbClr val="FF0000"/>
-              </a:solidFill>
-              <a:prstDash val="solid"/>
-              <a:round/>
-              <a:headEnd type="none" w="sm" len="sm"/>
-              <a:tailEnd type="none" w="sm" len="sm"/>
-            </a:ln>
-          </p:spPr>
-        </p:pic>
-        <p:sp>
-          <p:nvSpPr>
-            <p:cNvPr id="156" name="Google Shape;156;p22"/>
-            <p:cNvSpPr/>
-            <p:nvPr/>
-          </p:nvSpPr>
-          <p:spPr>
-            <a:xfrm rot="4557825">
-              <a:off x="8624096" y="3749686"/>
-              <a:ext cx="356236" cy="146831"/>
-            </a:xfrm>
-            <a:prstGeom prst="rightArrow">
-              <a:avLst>
-                <a:gd name="adj1" fmla="val 50000"/>
-                <a:gd name="adj2" fmla="val 50000"/>
-              </a:avLst>
-            </a:prstGeom>
-            <a:solidFill>
-              <a:srgbClr val="FF0000"/>
-            </a:solidFill>
-            <a:ln w="9525" cap="flat" cmpd="sng">
-              <a:solidFill>
-                <a:schemeClr val="dk2"/>
-              </a:solidFill>
-              <a:prstDash val="solid"/>
-              <a:round/>
-              <a:headEnd type="none" w="sm" len="sm"/>
-              <a:tailEnd type="none" w="sm" len="sm"/>
-            </a:ln>
-          </p:spPr>
-          <p:txBody>
-            <a:bodyPr spcFirstLastPara="1" wrap="square" lIns="91425" tIns="91425" rIns="91425" bIns="91425" anchor="ctr" anchorCtr="0">
-              <a:noAutofit/>
-            </a:bodyPr>
-            <a:lstStyle/>
-            <a:p>
-              <a:pPr marL="0" lvl="0" indent="0" algn="ctr" rtl="0">
-                <a:spcBef>
-                  <a:spcPts val="0"/>
-                </a:spcBef>
-                <a:spcAft>
-                  <a:spcPts val="0"/>
-                </a:spcAft>
-                <a:buNone/>
-              </a:pPr>
-              <a:endParaRPr/>
-            </a:p>
-          </p:txBody>
-        </p:sp>
-      </p:grpSp>
     </p:spTree>
   </p:cSld>
   <p:clrMapOvr>
